--- a/Meetings/ZTN Präsentation.pptx
+++ b/Meetings/ZTN Präsentation.pptx
@@ -5,10 +5,10 @@
     <p:sldMasterId id="2147483717" r:id="rId1"/>
   </p:sldMasterIdLst>
   <p:notesMasterIdLst>
-    <p:notesMasterId r:id="rId12"/>
+    <p:notesMasterId r:id="rId13"/>
   </p:notesMasterIdLst>
   <p:handoutMasterIdLst>
-    <p:handoutMasterId r:id="rId13"/>
+    <p:handoutMasterId r:id="rId14"/>
   </p:handoutMasterIdLst>
   <p:sldIdLst>
     <p:sldId id="505" r:id="rId2"/>
@@ -19,8 +19,9 @@
     <p:sldId id="512" r:id="rId7"/>
     <p:sldId id="513" r:id="rId8"/>
     <p:sldId id="514" r:id="rId9"/>
-    <p:sldId id="507" r:id="rId10"/>
-    <p:sldId id="506" r:id="rId11"/>
+    <p:sldId id="515" r:id="rId10"/>
+    <p:sldId id="507" r:id="rId11"/>
+    <p:sldId id="506" r:id="rId12"/>
   </p:sldIdLst>
   <p:sldSz cx="9144000" cy="6858000" type="screen4x3"/>
   <p:notesSz cx="9928225" cy="6669088"/>
@@ -424,7 +425,7 @@
               <a:pPr>
                 <a:defRPr/>
               </a:pPr>
-              <a:t>20.05.2025</a:t>
+              <a:t>25.05.2025</a:t>
             </a:fld>
             <a:endParaRPr lang="de-DE" dirty="0"/>
           </a:p>
@@ -607,7 +608,7 @@
               <a:pPr>
                 <a:defRPr/>
               </a:pPr>
-              <a:t>20.05.2025</a:t>
+              <a:t>25.05.2025</a:t>
             </a:fld>
             <a:endParaRPr lang="de-DE" dirty="0"/>
           </a:p>
@@ -1069,119 +1070,36 @@
         </p:nvSpPr>
         <p:spPr/>
         <p:txBody>
-          <a:bodyPr/>
+          <a:bodyPr>
+            <a:normAutofit fontScale="92500" lnSpcReduction="10000"/>
+          </a:bodyPr>
           <a:lstStyle/>
           <a:p>
             <a:r>
-              <a:rPr lang="en-US" dirty="0"/>
+              <a:rPr lang="de-DE" noProof="0" dirty="0"/>
               <a:t>IT </a:t>
             </a:r>
             <a:r>
-              <a:rPr lang="en-US" dirty="0" err="1"/>
+              <a:rPr lang="de-DE" noProof="0" dirty="0" err="1"/>
               <a:t>Sichertheit</a:t>
             </a:r>
             <a:r>
-              <a:rPr lang="en-US" dirty="0"/>
-              <a:t> : </a:t>
-            </a:r>
-          </a:p>
-          <a:p>
-            <a:r>
-              <a:rPr lang="en-US" dirty="0" err="1"/>
-              <a:t>Zunehmende</a:t>
-            </a:r>
-            <a:r>
-              <a:rPr lang="en-US" dirty="0"/>
-              <a:t> </a:t>
-            </a:r>
-            <a:r>
-              <a:rPr lang="en-US" dirty="0" err="1"/>
-              <a:t>Bedrohung</a:t>
-            </a:r>
-            <a:endParaRPr lang="en-US" dirty="0"/>
-          </a:p>
-          <a:p>
-            <a:r>
-              <a:rPr lang="en-US" dirty="0"/>
-              <a:t>Technik </a:t>
-            </a:r>
-            <a:r>
-              <a:rPr lang="en-US" dirty="0" err="1"/>
-              <a:t>wird</a:t>
-            </a:r>
-            <a:r>
-              <a:rPr lang="en-US" dirty="0"/>
-              <a:t> immer </a:t>
-            </a:r>
-            <a:r>
-              <a:rPr lang="en-US" dirty="0" err="1"/>
-              <a:t>komplexer</a:t>
-            </a:r>
-            <a:r>
-              <a:rPr lang="en-US" dirty="0"/>
-              <a:t> -&gt; Fehler </a:t>
-            </a:r>
-            <a:r>
-              <a:rPr lang="en-US" dirty="0" err="1"/>
-              <a:t>bei</a:t>
-            </a:r>
-            <a:r>
-              <a:rPr lang="en-US" dirty="0"/>
-              <a:t> der </a:t>
-            </a:r>
-            <a:r>
-              <a:rPr lang="en-US" dirty="0" err="1"/>
-              <a:t>Programmierung</a:t>
-            </a:r>
-            <a:r>
-              <a:rPr lang="en-US" dirty="0"/>
-              <a:t>. Man </a:t>
-            </a:r>
-            <a:r>
-              <a:rPr lang="en-US" dirty="0" err="1"/>
-              <a:t>kann</a:t>
-            </a:r>
-            <a:r>
-              <a:rPr lang="en-US" dirty="0"/>
-              <a:t> </a:t>
-            </a:r>
-            <a:r>
-              <a:rPr lang="en-US" dirty="0" err="1"/>
-              <a:t>sich</a:t>
-            </a:r>
-            <a:r>
-              <a:rPr lang="en-US" dirty="0"/>
-              <a:t> </a:t>
-            </a:r>
-            <a:r>
-              <a:rPr lang="en-US" dirty="0" err="1"/>
-              <a:t>nicht</a:t>
-            </a:r>
-            <a:r>
-              <a:rPr lang="en-US" dirty="0"/>
-              <a:t> </a:t>
-            </a:r>
-            <a:r>
-              <a:rPr lang="en-US" dirty="0" err="1"/>
-              <a:t>mehr</a:t>
-            </a:r>
-            <a:r>
-              <a:rPr lang="en-US" dirty="0"/>
-              <a:t> auf Sicherheit von </a:t>
-            </a:r>
-            <a:r>
-              <a:rPr lang="en-US" dirty="0" err="1"/>
-              <a:t>Produkten</a:t>
-            </a:r>
-            <a:r>
-              <a:rPr lang="en-US" dirty="0"/>
-              <a:t> </a:t>
-            </a:r>
-            <a:r>
-              <a:rPr lang="en-US" dirty="0" err="1"/>
-              <a:t>verlassen</a:t>
-            </a:r>
-            <a:endParaRPr lang="en-US" dirty="0">
+              <a:rPr lang="de-DE" noProof="0" dirty="0"/>
+              <a:t> wird immer wichtiger:</a:t>
+            </a:r>
+          </a:p>
+          <a:p>
+            <a:r>
+              <a:rPr lang="de-DE" noProof="0" dirty="0"/>
+              <a:t>Zunehmende Bedrohung</a:t>
+            </a:r>
+          </a:p>
+          <a:p>
+            <a:r>
+              <a:rPr lang="de-DE" noProof="0" dirty="0"/>
+              <a:t>Technik wird immer komplexer -&gt; Fehler bei der Programmierung. Man kann sich nicht mehr auf Sicherheit von Produkten verlassen</a:t>
+            </a:r>
+            <a:endParaRPr lang="de-DE" noProof="0" dirty="0">
               <a:solidFill>
                 <a:srgbClr val="FF0000"/>
               </a:solidFill>
@@ -1191,301 +1109,48 @@
             </a:endParaRPr>
           </a:p>
           <a:p>
-            <a:endParaRPr lang="en-US" dirty="0"/>
-          </a:p>
-          <a:p>
-            <a:pPr marL="0" marR="0" lvl="0" indent="0" algn="l" defTabSz="914400" rtl="0" eaLnBrk="0" fontAlgn="base" latinLnBrk="0" hangingPunct="0">
-              <a:lnSpc>
-                <a:spcPct val="100000"/>
-              </a:lnSpc>
-              <a:spcBef>
-                <a:spcPct val="30000"/>
-              </a:spcBef>
-              <a:spcAft>
-                <a:spcPct val="0"/>
-              </a:spcAft>
-              <a:buClrTx/>
-              <a:buSzTx/>
-              <a:buFontTx/>
-              <a:buNone/>
-              <a:tabLst/>
-              <a:defRPr/>
-            </a:pPr>
-            <a:r>
-              <a:rPr lang="en-US" dirty="0"/>
-              <a:t>Moderner Stand der Technik</a:t>
-            </a:r>
-          </a:p>
-          <a:p>
-            <a:r>
-              <a:rPr lang="en-US" dirty="0"/>
-              <a:t>Zero Trust lost den Gedanken der </a:t>
-            </a:r>
-            <a:r>
-              <a:rPr lang="en-US" dirty="0" err="1"/>
-              <a:t>klassischen</a:t>
-            </a:r>
-            <a:r>
-              <a:rPr lang="en-US" dirty="0"/>
-              <a:t> perimeter Sicherheit ab.</a:t>
-            </a:r>
-          </a:p>
-          <a:p>
-            <a:r>
-              <a:rPr lang="en-US" dirty="0" err="1"/>
-              <a:t>Netzwerke</a:t>
-            </a:r>
-            <a:r>
-              <a:rPr lang="en-US" dirty="0"/>
-              <a:t> </a:t>
-            </a:r>
-            <a:r>
-              <a:rPr lang="en-US" dirty="0" err="1"/>
-              <a:t>sind</a:t>
-            </a:r>
-            <a:r>
-              <a:rPr lang="en-US" dirty="0"/>
-              <a:t> </a:t>
-            </a:r>
-            <a:r>
-              <a:rPr lang="en-US" dirty="0" err="1"/>
-              <a:t>nicht</a:t>
-            </a:r>
-            <a:r>
-              <a:rPr lang="en-US" dirty="0"/>
-              <a:t> </a:t>
-            </a:r>
-            <a:r>
-              <a:rPr lang="en-US" dirty="0" err="1"/>
-              <a:t>nur</a:t>
-            </a:r>
-            <a:r>
-              <a:rPr lang="en-US" dirty="0"/>
-              <a:t> </a:t>
-            </a:r>
-            <a:r>
-              <a:rPr lang="en-US" dirty="0" err="1"/>
-              <a:t>noch</a:t>
-            </a:r>
-            <a:r>
-              <a:rPr lang="en-US" dirty="0"/>
-              <a:t> hinter </a:t>
-            </a:r>
-            <a:r>
-              <a:rPr lang="en-US" dirty="0" err="1"/>
-              <a:t>einer</a:t>
-            </a:r>
-            <a:r>
-              <a:rPr lang="en-US" dirty="0"/>
-              <a:t> Firewall.</a:t>
-            </a:r>
-          </a:p>
-          <a:p>
-            <a:endParaRPr lang="en-US" dirty="0"/>
-          </a:p>
-          <a:p>
-            <a:r>
-              <a:rPr lang="en-US" dirty="0"/>
-              <a:t>Sicherheit </a:t>
-            </a:r>
-            <a:r>
-              <a:rPr lang="en-US" dirty="0" err="1"/>
-              <a:t>im</a:t>
-            </a:r>
-            <a:r>
-              <a:rPr lang="en-US" dirty="0"/>
-              <a:t> </a:t>
-            </a:r>
-            <a:r>
-              <a:rPr lang="en-US" dirty="0" err="1"/>
-              <a:t>eigenen</a:t>
-            </a:r>
-            <a:r>
-              <a:rPr lang="en-US" dirty="0"/>
-              <a:t> Haus:</a:t>
-            </a:r>
-          </a:p>
-          <a:p>
-            <a:r>
-              <a:rPr lang="en-US" dirty="0"/>
-              <a:t>Gehen </a:t>
-            </a:r>
-            <a:r>
-              <a:rPr lang="en-US" dirty="0" err="1"/>
-              <a:t>als</a:t>
-            </a:r>
-            <a:r>
-              <a:rPr lang="en-US" dirty="0"/>
-              <a:t> </a:t>
-            </a:r>
-            <a:r>
-              <a:rPr lang="en-US" dirty="0" err="1"/>
-              <a:t>starkes</a:t>
-            </a:r>
-            <a:r>
-              <a:rPr lang="en-US" dirty="0"/>
-              <a:t> </a:t>
-            </a:r>
-            <a:r>
-              <a:rPr lang="en-US" dirty="0" err="1"/>
-              <a:t>Beispiel</a:t>
-            </a:r>
-            <a:r>
-              <a:rPr lang="en-US" dirty="0"/>
-              <a:t> </a:t>
-            </a:r>
-            <a:r>
-              <a:rPr lang="en-US" dirty="0" err="1"/>
-              <a:t>voran</a:t>
-            </a:r>
-            <a:endParaRPr lang="en-US" dirty="0"/>
-          </a:p>
-          <a:p>
-            <a:r>
-              <a:rPr lang="en-US" dirty="0" err="1"/>
-              <a:t>Gerade</a:t>
-            </a:r>
-            <a:r>
-              <a:rPr lang="en-US" dirty="0"/>
-              <a:t> </a:t>
-            </a:r>
-            <a:r>
-              <a:rPr lang="en-US" dirty="0" err="1"/>
-              <a:t>wegen</a:t>
-            </a:r>
-            <a:r>
-              <a:rPr lang="en-US" dirty="0"/>
-              <a:t> der </a:t>
-            </a:r>
-            <a:r>
-              <a:rPr lang="en-US" dirty="0" err="1"/>
-              <a:t>zunehmenden</a:t>
-            </a:r>
-            <a:r>
-              <a:rPr lang="en-US" dirty="0"/>
-              <a:t> </a:t>
-            </a:r>
-            <a:r>
-              <a:rPr lang="en-US" dirty="0" err="1"/>
-              <a:t>Bedrohung</a:t>
-            </a:r>
-            <a:r>
-              <a:rPr lang="en-US" dirty="0"/>
-              <a:t>…. Ganz </a:t>
-            </a:r>
-            <a:r>
-              <a:rPr lang="en-US" dirty="0" err="1"/>
-              <a:t>schln</a:t>
-            </a:r>
-            <a:r>
-              <a:rPr lang="en-US" dirty="0"/>
-              <a:t> </a:t>
-            </a:r>
-            <a:r>
-              <a:rPr lang="en-US" dirty="0" err="1"/>
-              <a:t>sicherheit</a:t>
-            </a:r>
-            <a:r>
-              <a:rPr lang="en-US" dirty="0"/>
-              <a:t> </a:t>
-            </a:r>
-            <a:r>
-              <a:rPr lang="en-US" dirty="0" err="1"/>
-              <a:t>im</a:t>
-            </a:r>
-            <a:r>
-              <a:rPr lang="en-US" dirty="0"/>
-              <a:t> </a:t>
-            </a:r>
-            <a:r>
-              <a:rPr lang="en-US" dirty="0" err="1"/>
-              <a:t>eigenen</a:t>
-            </a:r>
-            <a:r>
-              <a:rPr lang="en-US" dirty="0"/>
-              <a:t> Haus </a:t>
-            </a:r>
-            <a:r>
-              <a:rPr lang="en-US" dirty="0" err="1"/>
-              <a:t>zu</a:t>
-            </a:r>
-            <a:r>
-              <a:rPr lang="en-US" dirty="0"/>
-              <a:t> </a:t>
-            </a:r>
-            <a:r>
-              <a:rPr lang="en-US" dirty="0" err="1"/>
-              <a:t>haben</a:t>
-            </a:r>
-            <a:endParaRPr lang="en-US" dirty="0"/>
-          </a:p>
-          <a:p>
-            <a:endParaRPr lang="en-US" dirty="0"/>
-          </a:p>
-          <a:p>
-            <a:r>
-              <a:rPr lang="en-US" dirty="0" err="1"/>
-              <a:t>Betreuung</a:t>
-            </a:r>
-            <a:r>
-              <a:rPr lang="en-US" dirty="0"/>
-              <a:t> von </a:t>
-            </a:r>
-            <a:r>
-              <a:rPr lang="en-US" dirty="0" err="1"/>
+            <a:endParaRPr lang="de-DE" noProof="0" dirty="0"/>
+          </a:p>
+          <a:p>
+            <a:r>
+              <a:rPr lang="de-DE" noProof="0" dirty="0"/>
+              <a:t>Sicherheit im Unternehmen:</a:t>
+            </a:r>
+          </a:p>
+          <a:p>
+            <a:r>
+              <a:rPr lang="de-DE" noProof="0" dirty="0"/>
+              <a:t>Gerade wegen zunehmender Bedrohung, sollte man Sicherheit im eigenen Haus haben</a:t>
+            </a:r>
+          </a:p>
+          <a:p>
+            <a:r>
+              <a:rPr lang="de-DE" noProof="0" dirty="0"/>
+              <a:t>Gehen als starkes Beispiel voran</a:t>
+            </a:r>
+          </a:p>
+          <a:p>
+            <a:endParaRPr lang="de-DE" noProof="0" dirty="0"/>
+          </a:p>
+          <a:p>
+            <a:r>
+              <a:rPr lang="de-DE" noProof="0" dirty="0"/>
+              <a:t>Betreuung von </a:t>
+            </a:r>
+            <a:r>
+              <a:rPr lang="de-DE" noProof="0" dirty="0" err="1"/>
               <a:t>Kundeninftreastruktur</a:t>
             </a:r>
             <a:r>
-              <a:rPr lang="en-US" dirty="0"/>
+              <a:rPr lang="de-DE" noProof="0" dirty="0"/>
               <a:t>:</a:t>
             </a:r>
           </a:p>
           <a:p>
             <a:r>
-              <a:rPr lang="en-US" dirty="0" err="1"/>
-              <a:t>Zudem</a:t>
-            </a:r>
-            <a:r>
-              <a:rPr lang="en-US" dirty="0"/>
-              <a:t> </a:t>
-            </a:r>
-            <a:r>
-              <a:rPr lang="en-US" dirty="0" err="1"/>
-              <a:t>betreut</a:t>
-            </a:r>
-            <a:r>
-              <a:rPr lang="en-US" dirty="0"/>
-              <a:t> die Firm die </a:t>
-            </a:r>
-            <a:r>
-              <a:rPr lang="en-US" dirty="0" err="1"/>
-              <a:t>Infrastruktur</a:t>
-            </a:r>
-            <a:r>
-              <a:rPr lang="en-US" dirty="0"/>
-              <a:t>….. </a:t>
-            </a:r>
-            <a:r>
-              <a:rPr lang="en-US" dirty="0" err="1"/>
-              <a:t>Rechenzentrum</a:t>
-            </a:r>
-            <a:r>
-              <a:rPr lang="en-US" dirty="0"/>
-              <a:t> = </a:t>
-            </a:r>
-            <a:r>
-              <a:rPr lang="en-US" dirty="0" err="1"/>
-              <a:t>zugriff</a:t>
-            </a:r>
-            <a:r>
-              <a:rPr lang="en-US" dirty="0"/>
-              <a:t> auf </a:t>
-            </a:r>
-            <a:r>
-              <a:rPr lang="en-US" dirty="0" err="1"/>
-              <a:t>Kundennetzwerke</a:t>
-            </a:r>
-            <a:endParaRPr lang="en-US" dirty="0"/>
+              <a:rPr lang="de-DE" noProof="0" dirty="0"/>
+              <a:t>Zudem betreut die Firm die Infrastruktur….. Rechenzentrum = zugriff auf Kundennetzwerke</a:t>
+            </a:r>
           </a:p>
           <a:p>
             <a:endParaRPr lang="en-US" dirty="0"/>
@@ -1636,7 +1301,7 @@
             <a:fld id="{4EF057B4-36A5-43B9-BAE8-234CEF337EF4}" type="slidenum">
               <a:rPr lang="de-DE" smtClean="0"/>
               <a:pPr/>
-              <a:t>9</a:t>
+              <a:t>10</a:t>
             </a:fld>
             <a:endParaRPr lang="de-DE" dirty="0"/>
           </a:p>
@@ -1748,7 +1413,7 @@
             <a:fld id="{4EF057B4-36A5-43B9-BAE8-234CEF337EF4}" type="slidenum">
               <a:rPr lang="de-DE" smtClean="0"/>
               <a:pPr/>
-              <a:t>10</a:t>
+              <a:t>11</a:t>
             </a:fld>
             <a:endParaRPr lang="de-DE" dirty="0"/>
           </a:p>
@@ -2850,7 +2515,7 @@
               <a:rPr lang="de-DE" sz="800" baseline="0" dirty="0">
                 <a:latin typeface="Verdana" pitchFamily="34" charset="0"/>
               </a:rPr>
-              <a:t>                                                    Hier steht der Titel - Hier steht der Name des Vortragenden</a:t>
+              <a:t>                                                                                                           Marc Reuschenberg</a:t>
             </a:r>
             <a:r>
               <a:rPr lang="de-DE" sz="800" dirty="0">
@@ -3423,6 +3088,178 @@
           <a:p>
             <a:r>
               <a:rPr lang="de-DE" dirty="0"/>
+              <a:t>Struktur</a:t>
+            </a:r>
+          </a:p>
+        </p:txBody>
+      </p:sp>
+      <p:sp>
+        <p:nvSpPr>
+          <p:cNvPr id="6" name="Inhaltsplatzhalter 5"/>
+          <p:cNvSpPr>
+            <a:spLocks noGrp="1"/>
+          </p:cNvSpPr>
+          <p:nvPr>
+            <p:ph idx="1"/>
+          </p:nvPr>
+        </p:nvSpPr>
+        <p:spPr/>
+        <p:txBody>
+          <a:bodyPr/>
+          <a:lstStyle/>
+          <a:p>
+            <a:pPr lvl="1"/>
+            <a:r>
+              <a:rPr lang="de-DE" dirty="0"/>
+              <a:t>Langer Vortrag </a:t>
+            </a:r>
+          </a:p>
+          <a:p>
+            <a:pPr lvl="2"/>
+            <a:r>
+              <a:rPr lang="de-DE" dirty="0"/>
+              <a:t>Dauer</a:t>
+            </a:r>
+          </a:p>
+          <a:p>
+            <a:pPr lvl="3"/>
+            <a:r>
+              <a:rPr lang="de-DE" dirty="0"/>
+              <a:t>20 Minuten, davon gut 15 Min Vortrag und der Rest für Fragen</a:t>
+            </a:r>
+          </a:p>
+          <a:p>
+            <a:pPr lvl="2"/>
+            <a:r>
+              <a:rPr lang="de-DE" dirty="0"/>
+              <a:t>Aufbau (grob)</a:t>
+            </a:r>
+          </a:p>
+          <a:p>
+            <a:pPr lvl="3"/>
+            <a:r>
+              <a:rPr lang="de-DE" dirty="0"/>
+              <a:t>Gliederung</a:t>
+            </a:r>
+          </a:p>
+          <a:p>
+            <a:pPr lvl="3"/>
+            <a:r>
+              <a:rPr lang="de-DE" dirty="0"/>
+              <a:t>Aufgabenstellung (Welches Problem soll gelöst werden?)</a:t>
+            </a:r>
+          </a:p>
+          <a:p>
+            <a:pPr lvl="3"/>
+            <a:r>
+              <a:rPr lang="de-DE" dirty="0"/>
+              <a:t>Umsetzung (Wie wurde das Problem gelöst?)</a:t>
+            </a:r>
+          </a:p>
+          <a:p>
+            <a:pPr lvl="3"/>
+            <a:r>
+              <a:rPr lang="de-DE" dirty="0"/>
+              <a:t>Ergebnisse</a:t>
+            </a:r>
+          </a:p>
+          <a:p>
+            <a:pPr lvl="3"/>
+            <a:r>
+              <a:rPr lang="de-DE" dirty="0"/>
+              <a:t>Zusammenfassung</a:t>
+            </a:r>
+          </a:p>
+          <a:p>
+            <a:pPr lvl="1"/>
+            <a:r>
+              <a:rPr lang="de-DE" dirty="0"/>
+              <a:t>Kurzer Vortrag</a:t>
+            </a:r>
+          </a:p>
+          <a:p>
+            <a:pPr lvl="2"/>
+            <a:r>
+              <a:rPr lang="de-DE" dirty="0"/>
+              <a:t>Dauer</a:t>
+            </a:r>
+          </a:p>
+          <a:p>
+            <a:pPr lvl="3"/>
+            <a:r>
+              <a:rPr lang="de-DE" dirty="0"/>
+              <a:t>insgesamt 10 Min mit Raum für 1-2 Fragen</a:t>
+            </a:r>
+          </a:p>
+          <a:p>
+            <a:pPr lvl="2"/>
+            <a:r>
+              <a:rPr lang="de-DE" dirty="0"/>
+              <a:t>Aufbau</a:t>
+            </a:r>
+          </a:p>
+          <a:p>
+            <a:pPr lvl="3"/>
+            <a:r>
+              <a:rPr lang="de-DE" dirty="0"/>
+              <a:t>Aufgabenstellung (Welches Problem soll gelöst werden?)</a:t>
+            </a:r>
+          </a:p>
+          <a:p>
+            <a:pPr lvl="3"/>
+            <a:r>
+              <a:rPr lang="de-DE" dirty="0"/>
+              <a:t>Vorgehen / Erste Ergebnisse</a:t>
+            </a:r>
+          </a:p>
+          <a:p>
+            <a:pPr lvl="2"/>
+            <a:endParaRPr lang="de-DE" dirty="0"/>
+          </a:p>
+        </p:txBody>
+      </p:sp>
+    </p:spTree>
+  </p:cSld>
+  <p:clrMapOvr>
+    <a:masterClrMapping/>
+  </p:clrMapOvr>
+</p:sld>
+</file>
+
+<file path=ppt/slides/slide11.xml><?xml version="1.0" encoding="utf-8"?>
+<p:sld xmlns:a="http://schemas.openxmlformats.org/drawingml/2006/main" xmlns:r="http://schemas.openxmlformats.org/officeDocument/2006/relationships" xmlns:p="http://schemas.openxmlformats.org/presentationml/2006/main">
+  <p:cSld>
+    <p:spTree>
+      <p:nvGrpSpPr>
+        <p:cNvPr id="1" name=""/>
+        <p:cNvGrpSpPr/>
+        <p:nvPr/>
+      </p:nvGrpSpPr>
+      <p:grpSpPr>
+        <a:xfrm>
+          <a:off x="0" y="0"/>
+          <a:ext cx="0" cy="0"/>
+          <a:chOff x="0" y="0"/>
+          <a:chExt cx="0" cy="0"/>
+        </a:xfrm>
+      </p:grpSpPr>
+      <p:sp>
+        <p:nvSpPr>
+          <p:cNvPr id="8194" name="Titel 6"/>
+          <p:cNvSpPr>
+            <a:spLocks noGrp="1"/>
+          </p:cNvSpPr>
+          <p:nvPr>
+            <p:ph type="title"/>
+          </p:nvPr>
+        </p:nvSpPr>
+        <p:spPr/>
+        <p:txBody>
+          <a:bodyPr/>
+          <a:lstStyle/>
+          <a:p>
+            <a:r>
+              <a:rPr lang="de-DE" dirty="0"/>
               <a:t>Template Benutzen (hier PPT 2013)</a:t>
             </a:r>
           </a:p>
@@ -3672,10 +3509,9 @@
           <a:lstStyle/>
           <a:p>
             <a:r>
-              <a:rPr lang="en-US" dirty="0" err="1"/>
+              <a:rPr lang="de-DE" noProof="0" dirty="0"/>
               <a:t>Übersicht</a:t>
             </a:r>
-            <a:endParaRPr lang="en-US" dirty="0"/>
           </a:p>
         </p:txBody>
       </p:sp>
@@ -3705,7 +3541,7 @@
               <a:buChar char="•"/>
             </a:pPr>
             <a:r>
-              <a:rPr lang="en-US" dirty="0"/>
+              <a:rPr lang="de-DE" noProof="0" dirty="0"/>
               <a:t>Motivation</a:t>
             </a:r>
           </a:p>
@@ -3714,7 +3550,7 @@
               <a:buFont typeface="Arial" panose="020B0604020202020204" pitchFamily="34" charset="0"/>
               <a:buChar char="•"/>
             </a:pPr>
-            <a:endParaRPr lang="en-US" dirty="0"/>
+            <a:endParaRPr lang="de-DE" noProof="0" dirty="0"/>
           </a:p>
           <a:p>
             <a:pPr marL="342900" indent="-342900">
@@ -3722,16 +3558,8 @@
               <a:buChar char="•"/>
             </a:pPr>
             <a:r>
-              <a:rPr lang="en-US" dirty="0"/>
-              <a:t>Was </a:t>
-            </a:r>
-            <a:r>
-              <a:rPr lang="en-US" dirty="0" err="1"/>
-              <a:t>ist</a:t>
-            </a:r>
-            <a:r>
-              <a:rPr lang="en-US" dirty="0"/>
-              <a:t> Zero Trust?</a:t>
+              <a:rPr lang="de-DE" noProof="0" dirty="0"/>
+              <a:t>Was ist Zero Trust?</a:t>
             </a:r>
           </a:p>
           <a:p>
@@ -3739,7 +3567,7 @@
               <a:buFont typeface="Arial" panose="020B0604020202020204" pitchFamily="34" charset="0"/>
               <a:buChar char="•"/>
             </a:pPr>
-            <a:endParaRPr lang="en-US" dirty="0"/>
+            <a:endParaRPr lang="de-DE" noProof="0" dirty="0"/>
           </a:p>
           <a:p>
             <a:pPr marL="342900" indent="-342900">
@@ -3747,17 +3575,16 @@
               <a:buChar char="•"/>
             </a:pPr>
             <a:r>
-              <a:rPr lang="en-US" dirty="0" err="1"/>
+              <a:rPr lang="de-DE" noProof="0" dirty="0"/>
               <a:t>Umsetzung</a:t>
             </a:r>
-            <a:endParaRPr lang="en-US" dirty="0"/>
           </a:p>
           <a:p>
             <a:pPr marL="342900" indent="-342900">
               <a:buFont typeface="Arial" panose="020B0604020202020204" pitchFamily="34" charset="0"/>
               <a:buChar char="•"/>
             </a:pPr>
-            <a:endParaRPr lang="en-US" dirty="0"/>
+            <a:endParaRPr lang="de-DE" noProof="0" dirty="0"/>
           </a:p>
           <a:p>
             <a:pPr marL="342900" indent="-342900">
@@ -3765,32 +3592,23 @@
               <a:buChar char="•"/>
             </a:pPr>
             <a:r>
-              <a:rPr lang="en-US" dirty="0" err="1"/>
-              <a:t>Besonderheiten</a:t>
-            </a:r>
-            <a:r>
-              <a:rPr lang="en-US" dirty="0"/>
-              <a:t> der </a:t>
-            </a:r>
-            <a:r>
-              <a:rPr lang="en-US" dirty="0" err="1"/>
-              <a:t>Bachelorarbeit</a:t>
-            </a:r>
-            <a:endParaRPr lang="en-US" dirty="0"/>
+              <a:rPr lang="de-DE" noProof="0" dirty="0"/>
+              <a:t>Besonderheiten der Bachelorarbeit</a:t>
+            </a:r>
           </a:p>
           <a:p>
             <a:pPr marL="342900" indent="-342900">
               <a:buFont typeface="Arial" panose="020B0604020202020204" pitchFamily="34" charset="0"/>
               <a:buChar char="•"/>
             </a:pPr>
-            <a:endParaRPr lang="en-US" dirty="0"/>
+            <a:endParaRPr lang="de-DE" noProof="0" dirty="0"/>
           </a:p>
           <a:p>
             <a:pPr marL="342900" indent="-342900">
               <a:buFont typeface="Arial" panose="020B0604020202020204" pitchFamily="34" charset="0"/>
               <a:buChar char="•"/>
             </a:pPr>
-            <a:endParaRPr lang="en-US" dirty="0"/>
+            <a:endParaRPr lang="de-DE" noProof="0" dirty="0"/>
           </a:p>
         </p:txBody>
       </p:sp>
@@ -3879,15 +3697,24 @@
             </a:pPr>
             <a:r>
               <a:rPr lang="de-DE" noProof="0" dirty="0"/>
-              <a:t>IT-Sicherheit wird immer wichtiger (</a:t>
-            </a:r>
-            <a:r>
-              <a:rPr lang="de-DE" noProof="0" dirty="0" err="1"/>
-              <a:t>studie</a:t>
-            </a:r>
+              <a:t>IT-Sicherheit wird immer wichtiger</a:t>
+            </a:r>
+          </a:p>
+          <a:p>
+            <a:endParaRPr lang="de-DE" noProof="0" dirty="0"/>
+          </a:p>
+          <a:p>
+            <a:pPr marL="342900" indent="-342900">
+              <a:buFont typeface="Arial" panose="020B0604020202020204" pitchFamily="34" charset="0"/>
+              <a:buChar char="•"/>
+            </a:pPr>
             <a:r>
               <a:rPr lang="de-DE" noProof="0" dirty="0"/>
-              <a:t>)</a:t>
+              <a:t>Sicherheit i</a:t>
+            </a:r>
+            <a:r>
+              <a:rPr lang="de-DE" dirty="0"/>
+              <a:t>m Unternehmen</a:t>
             </a:r>
           </a:p>
           <a:p>
@@ -3903,44 +3730,6 @@
               <a:buChar char="•"/>
             </a:pPr>
             <a:r>
-              <a:rPr lang="de-DE" noProof="0" dirty="0"/>
-              <a:t>Moderner Stand der Technik (seit wann gibt es das)</a:t>
-            </a:r>
-          </a:p>
-          <a:p>
-            <a:pPr marL="342900" indent="-342900">
-              <a:buFont typeface="Arial" panose="020B0604020202020204" pitchFamily="34" charset="0"/>
-              <a:buChar char="•"/>
-            </a:pPr>
-            <a:endParaRPr lang="de-DE" noProof="0" dirty="0"/>
-          </a:p>
-          <a:p>
-            <a:pPr marL="342900" indent="-342900">
-              <a:buFont typeface="Arial" panose="020B0604020202020204" pitchFamily="34" charset="0"/>
-              <a:buChar char="•"/>
-            </a:pPr>
-            <a:r>
-              <a:rPr lang="de-DE" noProof="0" dirty="0"/>
-              <a:t>Sicherheit i</a:t>
-            </a:r>
-            <a:r>
-              <a:rPr lang="de-DE" dirty="0"/>
-              <a:t>m Unternehmen</a:t>
-            </a:r>
-          </a:p>
-          <a:p>
-            <a:pPr marL="342900" indent="-342900">
-              <a:buFont typeface="Arial" panose="020B0604020202020204" pitchFamily="34" charset="0"/>
-              <a:buChar char="•"/>
-            </a:pPr>
-            <a:endParaRPr lang="de-DE" noProof="0" dirty="0"/>
-          </a:p>
-          <a:p>
-            <a:pPr marL="342900" indent="-342900">
-              <a:buFont typeface="Arial" panose="020B0604020202020204" pitchFamily="34" charset="0"/>
-              <a:buChar char="•"/>
-            </a:pPr>
-            <a:r>
               <a:rPr lang="de-DE" dirty="0"/>
               <a:t>Schutz der</a:t>
             </a:r>
@@ -3952,22 +3741,104 @@
           <a:p>
             <a:endParaRPr lang="de-DE" noProof="0" dirty="0"/>
           </a:p>
-          <a:p>
-            <a:endParaRPr lang="de-DE" noProof="0" dirty="0"/>
-          </a:p>
-          <a:p>
-            <a:pPr marL="342900" indent="-342900">
-              <a:buFont typeface="Arial" panose="020B0604020202020204" pitchFamily="34" charset="0"/>
-              <a:buChar char="•"/>
-            </a:pPr>
-            <a:endParaRPr lang="de-DE" noProof="0" dirty="0"/>
-          </a:p>
-          <a:p>
-            <a:pPr marL="342900" indent="-342900">
-              <a:buFont typeface="Arial" panose="020B0604020202020204" pitchFamily="34" charset="0"/>
-              <a:buChar char="•"/>
-            </a:pPr>
-            <a:endParaRPr lang="de-DE" noProof="0" dirty="0"/>
+        </p:txBody>
+      </p:sp>
+      <p:pic>
+        <p:nvPicPr>
+          <p:cNvPr id="1026" name="Picture 2" descr="Weltweiter Durchschnitt wöchentlicher Cyberattacken(Bild:  Check Point Software Technologies Ltd.)">
+            <a:extLst>
+              <a:ext uri="{FF2B5EF4-FFF2-40B4-BE49-F238E27FC236}">
+                <a16:creationId xmlns:a16="http://schemas.microsoft.com/office/drawing/2014/main" id="{1AF4964C-83A5-27E0-1188-7413F860640B}"/>
+              </a:ext>
+            </a:extLst>
+          </p:cNvPr>
+          <p:cNvPicPr>
+            <a:picLocks noChangeAspect="1" noChangeArrowheads="1"/>
+          </p:cNvPicPr>
+          <p:nvPr/>
+        </p:nvPicPr>
+        <p:blipFill>
+          <a:blip r:embed="rId3">
+            <a:extLst>
+              <a:ext uri="{28A0092B-C50C-407E-A947-70E740481C1C}">
+                <a14:useLocalDpi xmlns:a14="http://schemas.microsoft.com/office/drawing/2010/main" val="0"/>
+              </a:ext>
+            </a:extLst>
+          </a:blip>
+          <a:srcRect/>
+          <a:stretch>
+            <a:fillRect/>
+          </a:stretch>
+        </p:blipFill>
+        <p:spPr bwMode="auto">
+          <a:xfrm>
+            <a:off x="5580239" y="3133851"/>
+            <a:ext cx="3441841" cy="3100335"/>
+          </a:xfrm>
+          <a:prstGeom prst="rect">
+            <a:avLst/>
+          </a:prstGeom>
+          <a:noFill/>
+          <a:extLst>
+            <a:ext uri="{909E8E84-426E-40DD-AFC4-6F175D3DCCD1}">
+              <a14:hiddenFill xmlns:a14="http://schemas.microsoft.com/office/drawing/2010/main">
+                <a:solidFill>
+                  <a:srgbClr val="FFFFFF"/>
+                </a:solidFill>
+              </a14:hiddenFill>
+            </a:ext>
+          </a:extLst>
+        </p:spPr>
+      </p:pic>
+      <p:sp>
+        <p:nvSpPr>
+          <p:cNvPr id="4" name="Textfeld 3">
+            <a:extLst>
+              <a:ext uri="{FF2B5EF4-FFF2-40B4-BE49-F238E27FC236}">
+                <a16:creationId xmlns:a16="http://schemas.microsoft.com/office/drawing/2014/main" id="{E1E2A3AD-E2C7-179C-1AE3-64DB718B937B}"/>
+              </a:ext>
+            </a:extLst>
+          </p:cNvPr>
+          <p:cNvSpPr txBox="1"/>
+          <p:nvPr/>
+        </p:nvSpPr>
+        <p:spPr>
+          <a:xfrm>
+            <a:off x="6362973" y="6234186"/>
+            <a:ext cx="1876371" cy="276999"/>
+          </a:xfrm>
+          <a:prstGeom prst="rect">
+            <a:avLst/>
+          </a:prstGeom>
+          <a:noFill/>
+        </p:spPr>
+        <p:txBody>
+          <a:bodyPr wrap="square" rtlCol="0">
+            <a:spAutoFit/>
+          </a:bodyPr>
+          <a:lstStyle/>
+          <a:p>
+            <a:pPr algn="ctr"/>
+            <a:r>
+              <a:rPr lang="de-DE" sz="600" b="0" i="1" dirty="0">
+                <a:effectLst/>
+                <a:latin typeface="Fira Sans VF"/>
+              </a:rPr>
+              <a:t>Weltweiter Durchschnitt wöchentlicher Cyberattacken</a:t>
+            </a:r>
+            <a:br>
+              <a:rPr lang="de-DE" sz="600" b="0" i="1" dirty="0">
+                <a:effectLst/>
+                <a:latin typeface="Fira Sans VF"/>
+              </a:rPr>
+            </a:br>
+            <a:r>
+              <a:rPr lang="de-DE" sz="600" b="0" i="1" dirty="0">
+                <a:effectLst/>
+                <a:latin typeface="Fira Sans VF"/>
+              </a:rPr>
+              <a:t>(Bild: Check Point Software Technologies Ltd.)</a:t>
+            </a:r>
           </a:p>
         </p:txBody>
       </p:sp>
@@ -4068,15 +3939,7 @@
             </a:pPr>
             <a:r>
               <a:rPr lang="de-DE" dirty="0"/>
-              <a:t>Sicherheitsmodell (Perimeter Schutz </a:t>
-            </a:r>
-            <a:r>
-              <a:rPr lang="de-DE" dirty="0" err="1"/>
-              <a:t>vs</a:t>
-            </a:r>
-            <a:r>
-              <a:rPr lang="de-DE" dirty="0"/>
-              <a:t> ZT)</a:t>
+              <a:t>Sicherheitsmodell</a:t>
             </a:r>
           </a:p>
           <a:p>
@@ -4093,19 +3956,6 @@
             </a:pPr>
             <a:r>
               <a:rPr lang="de-DE" dirty="0"/>
-              <a:t>Philosophie </a:t>
-            </a:r>
-          </a:p>
-          <a:p>
-            <a:endParaRPr lang="de-DE" dirty="0"/>
-          </a:p>
-          <a:p>
-            <a:pPr marL="342900" indent="-342900">
-              <a:buFont typeface="Arial" panose="020B0604020202020204" pitchFamily="34" charset="0"/>
-              <a:buChar char="•"/>
-            </a:pPr>
-            <a:r>
-              <a:rPr lang="de-DE" dirty="0"/>
               <a:t>Ganzheitliches Denken</a:t>
             </a:r>
           </a:p>
@@ -4123,7 +3973,24 @@
             </a:pPr>
             <a:r>
               <a:rPr lang="de-DE" dirty="0"/>
-              <a:t>Beinhaltet Kernprinzipien</a:t>
+              <a:t>Angreifer innen und außerhalb</a:t>
+            </a:r>
+          </a:p>
+          <a:p>
+            <a:pPr marL="342900" indent="-342900">
+              <a:buFont typeface="Arial" panose="020B0604020202020204" pitchFamily="34" charset="0"/>
+              <a:buChar char="•"/>
+            </a:pPr>
+            <a:endParaRPr lang="de-DE" dirty="0"/>
+          </a:p>
+          <a:p>
+            <a:pPr marL="342900" indent="-342900">
+              <a:buFont typeface="Arial" panose="020B0604020202020204" pitchFamily="34" charset="0"/>
+              <a:buChar char="•"/>
+            </a:pPr>
+            <a:r>
+              <a:rPr lang="de-DE" dirty="0"/>
+              <a:t>Kontinuierliche Überprüfung und Authentifizierung</a:t>
             </a:r>
           </a:p>
           <a:p>
@@ -4517,6 +4384,41 @@
           <a:chExt cx="0" cy="0"/>
         </a:xfrm>
       </p:grpSpPr>
+      <p:pic>
+        <p:nvPicPr>
+          <p:cNvPr id="5" name="Inhaltsplatzhalter 4" descr="Ein Bild, das Text, Diagramm, Plan, technische Zeichnung enthält.&#10;&#10;KI-generierte Inhalte können fehlerhaft sein.">
+            <a:extLst>
+              <a:ext uri="{FF2B5EF4-FFF2-40B4-BE49-F238E27FC236}">
+                <a16:creationId xmlns:a16="http://schemas.microsoft.com/office/drawing/2014/main" id="{08015E64-446A-16C6-5DD2-6F38CECBFBEE}"/>
+              </a:ext>
+            </a:extLst>
+          </p:cNvPr>
+          <p:cNvPicPr>
+            <a:picLocks noGrp="1" noChangeAspect="1"/>
+          </p:cNvPicPr>
+          <p:nvPr>
+            <p:ph idx="1"/>
+          </p:nvPr>
+        </p:nvPicPr>
+        <p:blipFill>
+          <a:blip r:embed="rId2" cstate="print">
+            <a:extLst>
+              <a:ext uri="{28A0092B-C50C-407E-A947-70E740481C1C}">
+                <a14:useLocalDpi xmlns:a14="http://schemas.microsoft.com/office/drawing/2010/main" val="0"/>
+              </a:ext>
+            </a:extLst>
+          </a:blip>
+          <a:stretch>
+            <a:fillRect/>
+          </a:stretch>
+        </p:blipFill>
+        <p:spPr>
+          <a:xfrm>
+            <a:off x="0" y="1279771"/>
+            <a:ext cx="9144000" cy="5197229"/>
+          </a:xfrm>
+        </p:spPr>
+      </p:pic>
       <p:sp>
         <p:nvSpPr>
           <p:cNvPr id="2" name="Titel 1">
@@ -4547,26 +4449,53 @@
       </p:sp>
       <p:sp>
         <p:nvSpPr>
-          <p:cNvPr id="3" name="Inhaltsplatzhalter 2">
+          <p:cNvPr id="8" name="Rechteck 7">
             <a:extLst>
               <a:ext uri="{FF2B5EF4-FFF2-40B4-BE49-F238E27FC236}">
-                <a16:creationId xmlns:a16="http://schemas.microsoft.com/office/drawing/2014/main" id="{7B9D264C-50E5-7DF1-EAEC-D286F4900AFD}"/>
+                <a16:creationId xmlns:a16="http://schemas.microsoft.com/office/drawing/2014/main" id="{621A7DDA-1436-1D6A-CB8A-820DD75C80D5}"/>
               </a:ext>
             </a:extLst>
           </p:cNvPr>
-          <p:cNvSpPr>
-            <a:spLocks noGrp="1"/>
-          </p:cNvSpPr>
-          <p:nvPr>
-            <p:ph idx="1"/>
-          </p:nvPr>
+          <p:cNvSpPr/>
+          <p:nvPr/>
         </p:nvSpPr>
-        <p:spPr/>
+        <p:spPr>
+          <a:xfrm>
+            <a:off x="8458200" y="114300"/>
+            <a:ext cx="685800" cy="1165471"/>
+          </a:xfrm>
+          <a:prstGeom prst="rect">
+            <a:avLst/>
+          </a:prstGeom>
+          <a:solidFill>
+            <a:schemeClr val="bg1"/>
+          </a:solidFill>
+          <a:ln>
+            <a:noFill/>
+          </a:ln>
+        </p:spPr>
+        <p:style>
+          <a:lnRef idx="2">
+            <a:schemeClr val="accent1">
+              <a:shade val="15000"/>
+            </a:schemeClr>
+          </a:lnRef>
+          <a:fillRef idx="1">
+            <a:schemeClr val="accent1"/>
+          </a:fillRef>
+          <a:effectRef idx="0">
+            <a:schemeClr val="accent1"/>
+          </a:effectRef>
+          <a:fontRef idx="minor">
+            <a:schemeClr val="lt1"/>
+          </a:fontRef>
+        </p:style>
         <p:txBody>
-          <a:bodyPr/>
+          <a:bodyPr rtlCol="0" anchor="ctr"/>
           <a:lstStyle/>
           <a:p>
-            <a:endParaRPr lang="de-DE" dirty="0"/>
+            <a:pPr algn="ctr"/>
+            <a:endParaRPr lang="de-DE"/>
           </a:p>
         </p:txBody>
       </p:sp>
@@ -4660,7 +4589,29 @@
           <a:p>
             <a:r>
               <a:rPr lang="de-DE" dirty="0"/>
-              <a:t>Kein konkreter Leitfaden – nur </a:t>
+              <a:t>Umsetzung eines ZTN in einer Testumgebung</a:t>
+            </a:r>
+          </a:p>
+          <a:p>
+            <a:endParaRPr lang="de-DE" dirty="0"/>
+          </a:p>
+          <a:p>
+            <a:r>
+              <a:rPr lang="de-DE" dirty="0" err="1"/>
+              <a:t>FortiNet</a:t>
+            </a:r>
+            <a:r>
+              <a:rPr lang="de-DE" dirty="0"/>
+              <a:t> Produktpalette</a:t>
+            </a:r>
+          </a:p>
+          <a:p>
+            <a:endParaRPr lang="de-DE" dirty="0"/>
+          </a:p>
+          <a:p>
+            <a:r>
+              <a:rPr lang="de-DE" dirty="0"/>
+              <a:t>Umsetzung von </a:t>
             </a:r>
             <a:r>
               <a:rPr lang="de-DE" dirty="0" err="1"/>
@@ -4672,44 +4623,9 @@
             </a:r>
             <a:r>
               <a:rPr lang="de-DE" dirty="0" err="1"/>
-              <a:t>practise</a:t>
+              <a:t>practis</a:t>
             </a:r>
             <a:endParaRPr lang="de-DE" dirty="0"/>
-          </a:p>
-          <a:p>
-            <a:endParaRPr lang="de-DE" dirty="0"/>
-          </a:p>
-          <a:p>
-            <a:r>
-              <a:rPr lang="de-DE" dirty="0"/>
-              <a:t>Direkte Praxisanwendung</a:t>
-            </a:r>
-          </a:p>
-          <a:p>
-            <a:endParaRPr lang="de-DE" dirty="0"/>
-          </a:p>
-          <a:p>
-            <a:r>
-              <a:rPr lang="de-DE" dirty="0"/>
-              <a:t>Implementierung in einer Testumgebung</a:t>
-            </a:r>
-          </a:p>
-          <a:p>
-            <a:endParaRPr lang="de-DE" dirty="0"/>
-          </a:p>
-          <a:p>
-            <a:r>
-              <a:rPr lang="de-DE" dirty="0"/>
-              <a:t>Umsetzung mittels </a:t>
-            </a:r>
-            <a:r>
-              <a:rPr lang="de-DE" dirty="0" err="1"/>
-              <a:t>FortiNet</a:t>
-            </a:r>
-            <a:r>
-              <a:rPr lang="de-DE" dirty="0"/>
-              <a:t> Produkten</a:t>
-            </a:r>
           </a:p>
           <a:p>
             <a:endParaRPr lang="de-DE" dirty="0"/>
@@ -4751,7 +4667,13 @@
       </p:grpSpPr>
       <p:sp>
         <p:nvSpPr>
-          <p:cNvPr id="8194" name="Titel 6"/>
+          <p:cNvPr id="2" name="Titel 1">
+            <a:extLst>
+              <a:ext uri="{FF2B5EF4-FFF2-40B4-BE49-F238E27FC236}">
+                <a16:creationId xmlns:a16="http://schemas.microsoft.com/office/drawing/2014/main" id="{459502B1-CF46-70C6-D6DE-641574FAAB28}"/>
+              </a:ext>
+            </a:extLst>
+          </p:cNvPr>
           <p:cNvSpPr>
             <a:spLocks noGrp="1"/>
           </p:cNvSpPr>
@@ -4766,14 +4688,20 @@
           <a:p>
             <a:r>
               <a:rPr lang="de-DE" dirty="0"/>
-              <a:t>Struktur</a:t>
+              <a:t>Ähnliche Arbeiten</a:t>
             </a:r>
           </a:p>
         </p:txBody>
       </p:sp>
       <p:sp>
         <p:nvSpPr>
-          <p:cNvPr id="6" name="Inhaltsplatzhalter 5"/>
+          <p:cNvPr id="3" name="Inhaltsplatzhalter 2">
+            <a:extLst>
+              <a:ext uri="{FF2B5EF4-FFF2-40B4-BE49-F238E27FC236}">
+                <a16:creationId xmlns:a16="http://schemas.microsoft.com/office/drawing/2014/main" id="{9864D2B7-575B-D770-0679-035A650D5DE6}"/>
+              </a:ext>
+            </a:extLst>
+          </p:cNvPr>
           <p:cNvSpPr>
             <a:spLocks noGrp="1"/>
           </p:cNvSpPr>
@@ -4786,117 +4714,99 @@
           <a:bodyPr/>
           <a:lstStyle/>
           <a:p>
-            <a:pPr lvl="1"/>
-            <a:r>
-              <a:rPr lang="de-DE" dirty="0"/>
-              <a:t>Langer Vortrag </a:t>
-            </a:r>
-          </a:p>
-          <a:p>
-            <a:pPr lvl="2"/>
-            <a:r>
-              <a:rPr lang="de-DE" dirty="0"/>
-              <a:t>Dauer</a:t>
-            </a:r>
-          </a:p>
-          <a:p>
-            <a:pPr lvl="3"/>
-            <a:r>
-              <a:rPr lang="de-DE" dirty="0"/>
-              <a:t>20 Minuten, davon gut 15 Min Vortrag und der Rest für Fragen</a:t>
-            </a:r>
-          </a:p>
-          <a:p>
-            <a:pPr lvl="2"/>
-            <a:r>
-              <a:rPr lang="de-DE" dirty="0"/>
-              <a:t>Aufbau (grob)</a:t>
-            </a:r>
-          </a:p>
-          <a:p>
-            <a:pPr lvl="3"/>
-            <a:r>
-              <a:rPr lang="de-DE" dirty="0"/>
-              <a:t>Gliederung</a:t>
-            </a:r>
-          </a:p>
-          <a:p>
-            <a:pPr lvl="3"/>
-            <a:r>
-              <a:rPr lang="de-DE" dirty="0"/>
-              <a:t>Aufgabenstellung (Welches Problem soll gelöst werden?)</a:t>
-            </a:r>
-          </a:p>
-          <a:p>
-            <a:pPr lvl="3"/>
-            <a:r>
-              <a:rPr lang="de-DE" dirty="0"/>
-              <a:t>Umsetzung (Wie wurde das Problem gelöst?)</a:t>
-            </a:r>
-          </a:p>
-          <a:p>
-            <a:pPr lvl="3"/>
-            <a:r>
-              <a:rPr lang="de-DE" dirty="0"/>
-              <a:t>Ergebnisse</a:t>
-            </a:r>
-          </a:p>
-          <a:p>
-            <a:pPr lvl="3"/>
-            <a:r>
-              <a:rPr lang="de-DE" dirty="0"/>
-              <a:t>Zusammenfassung</a:t>
-            </a:r>
-          </a:p>
-          <a:p>
-            <a:pPr lvl="1"/>
-            <a:r>
-              <a:rPr lang="de-DE" dirty="0"/>
-              <a:t>Kurzer Vortrag</a:t>
-            </a:r>
-          </a:p>
-          <a:p>
-            <a:pPr lvl="2"/>
-            <a:r>
-              <a:rPr lang="de-DE" dirty="0"/>
-              <a:t>Dauer</a:t>
-            </a:r>
-          </a:p>
-          <a:p>
-            <a:pPr lvl="3"/>
-            <a:r>
-              <a:rPr lang="de-DE" dirty="0"/>
-              <a:t>insgesamt 10 Min mit Raum für 1-2 Fragen</a:t>
-            </a:r>
-          </a:p>
-          <a:p>
-            <a:pPr lvl="2"/>
-            <a:r>
-              <a:rPr lang="de-DE" dirty="0"/>
-              <a:t>Aufbau</a:t>
-            </a:r>
-          </a:p>
-          <a:p>
-            <a:pPr lvl="3"/>
-            <a:r>
-              <a:rPr lang="de-DE" dirty="0"/>
-              <a:t>Aufgabenstellung (Welches Problem soll gelöst werden?)</a:t>
-            </a:r>
-          </a:p>
-          <a:p>
-            <a:pPr lvl="3"/>
-            <a:r>
-              <a:rPr lang="de-DE" dirty="0"/>
-              <a:t>Vorgehen / Erste Ergebnisse</a:t>
-            </a:r>
-          </a:p>
-          <a:p>
-            <a:pPr lvl="2"/>
-            <a:endParaRPr lang="de-DE" dirty="0"/>
+            <a:pPr marL="342900" indent="-342900">
+              <a:buFont typeface="Arial" panose="020B0604020202020204" pitchFamily="34" charset="0"/>
+              <a:buChar char="•"/>
+            </a:pPr>
+            <a:r>
+              <a:rPr lang="en-US" dirty="0"/>
+              <a:t>Cornelius </a:t>
+            </a:r>
+            <a:r>
+              <a:rPr lang="en-US" dirty="0" err="1"/>
+              <a:t>Itodo</a:t>
+            </a:r>
+            <a:r>
+              <a:rPr lang="en-US" dirty="0"/>
+              <a:t>, Murat Ozer</a:t>
+            </a:r>
+            <a:br>
+              <a:rPr lang="en-US" dirty="0"/>
+            </a:br>
+            <a:r>
+              <a:rPr lang="en-US" dirty="0"/>
+              <a:t>Multivocal literature review on zero-trust security implementation</a:t>
+            </a:r>
+            <a:br>
+              <a:rPr lang="de-DE" b="0" i="0" dirty="0">
+                <a:solidFill>
+                  <a:srgbClr val="1F1F1F"/>
+                </a:solidFill>
+                <a:effectLst/>
+                <a:latin typeface="ElsevierSans"/>
+              </a:rPr>
+            </a:br>
+            <a:r>
+              <a:rPr lang="de-DE" sz="1800" b="0" i="0" dirty="0">
+                <a:solidFill>
+                  <a:srgbClr val="1F1F1F"/>
+                </a:solidFill>
+                <a:effectLst/>
+                <a:latin typeface="ElsevierSans"/>
+                <a:hlinkClick r:id="rId2"/>
+              </a:rPr>
+              <a:t>https://www.sciencedirect.com/science/article/abs/pii/S0167404824001287</a:t>
+            </a:r>
+            <a:endParaRPr lang="de-DE" sz="1800" b="0" i="0" dirty="0">
+              <a:solidFill>
+                <a:srgbClr val="1F1F1F"/>
+              </a:solidFill>
+              <a:effectLst/>
+              <a:latin typeface="ElsevierSans"/>
+            </a:endParaRPr>
+          </a:p>
+          <a:p>
+            <a:pPr marL="342900" indent="-342900">
+              <a:buFont typeface="Arial" panose="020B0604020202020204" pitchFamily="34" charset="0"/>
+              <a:buChar char="•"/>
+            </a:pPr>
+            <a:endParaRPr lang="de-DE" sz="1800" dirty="0">
+              <a:solidFill>
+                <a:srgbClr val="1F1F1F"/>
+              </a:solidFill>
+              <a:latin typeface="ElsevierSans"/>
+            </a:endParaRPr>
+          </a:p>
+          <a:p>
+            <a:pPr marL="342900" indent="-342900">
+              <a:buFont typeface="Arial" panose="020B0604020202020204" pitchFamily="34" charset="0"/>
+              <a:buChar char="•"/>
+            </a:pPr>
+            <a:br>
+              <a:rPr lang="en-US" b="0" i="0" dirty="0">
+                <a:solidFill>
+                  <a:srgbClr val="1F1F1F"/>
+                </a:solidFill>
+                <a:effectLst/>
+                <a:latin typeface="ElsevierGulliver"/>
+              </a:rPr>
+            </a:br>
+            <a:endParaRPr lang="en-US" b="0" i="0" dirty="0">
+              <a:solidFill>
+                <a:srgbClr val="1F1F1F"/>
+              </a:solidFill>
+              <a:effectLst/>
+              <a:latin typeface="ElsevierGulliver"/>
+            </a:endParaRPr>
           </a:p>
         </p:txBody>
       </p:sp>
     </p:spTree>
+    <p:extLst>
+      <p:ext uri="{BB962C8B-B14F-4D97-AF65-F5344CB8AC3E}">
+        <p14:creationId xmlns:p14="http://schemas.microsoft.com/office/powerpoint/2010/main" val="2480421540"/>
+      </p:ext>
+    </p:extLst>
   </p:cSld>
   <p:clrMapOvr>
     <a:masterClrMapping/>

--- a/Meetings/ZTN Präsentation.pptx
+++ b/Meetings/ZTN Präsentation.pptx
@@ -15,13 +15,13 @@
     <p:sldId id="508" r:id="rId3"/>
     <p:sldId id="509" r:id="rId4"/>
     <p:sldId id="510" r:id="rId5"/>
-    <p:sldId id="511" r:id="rId6"/>
-    <p:sldId id="512" r:id="rId7"/>
-    <p:sldId id="513" r:id="rId8"/>
-    <p:sldId id="514" r:id="rId9"/>
-    <p:sldId id="515" r:id="rId10"/>
-    <p:sldId id="507" r:id="rId11"/>
-    <p:sldId id="506" r:id="rId12"/>
+    <p:sldId id="516" r:id="rId6"/>
+    <p:sldId id="511" r:id="rId7"/>
+    <p:sldId id="512" r:id="rId8"/>
+    <p:sldId id="513" r:id="rId9"/>
+    <p:sldId id="514" r:id="rId10"/>
+    <p:sldId id="515" r:id="rId11"/>
+    <p:sldId id="517" r:id="rId12"/>
   </p:sldIdLst>
   <p:sldSz cx="9144000" cy="6858000" type="screen4x3"/>
   <p:notesSz cx="9928225" cy="6669088"/>
@@ -1071,7 +1071,7 @@
         <p:spPr/>
         <p:txBody>
           <a:bodyPr>
-            <a:normAutofit fontScale="92500" lnSpcReduction="10000"/>
+            <a:normAutofit/>
           </a:bodyPr>
           <a:lstStyle/>
           <a:p>
@@ -1227,29 +1227,19 @@
       </p:grpSpPr>
       <p:sp>
         <p:nvSpPr>
-          <p:cNvPr id="13314" name="Folienbildplatzhalter 1"/>
+          <p:cNvPr id="2" name="Folienbildplatzhalter 1"/>
           <p:cNvSpPr>
-            <a:spLocks noGrp="1" noRot="1" noChangeAspect="1" noTextEdit="1"/>
+            <a:spLocks noGrp="1" noRot="1" noChangeAspect="1"/>
           </p:cNvSpPr>
           <p:nvPr>
             <p:ph type="sldImg"/>
           </p:nvPr>
         </p:nvSpPr>
-        <p:spPr bwMode="auto">
-          <a:noFill/>
-          <a:ln>
-            <a:solidFill>
-              <a:srgbClr val="000000"/>
-            </a:solidFill>
-            <a:miter lim="800000"/>
-            <a:headEnd/>
-            <a:tailEnd/>
-          </a:ln>
-        </p:spPr>
-      </p:sp>
-      <p:sp>
-        <p:nvSpPr>
-          <p:cNvPr id="13315" name="Notizenplatzhalter 2"/>
+        <p:spPr/>
+      </p:sp>
+      <p:sp>
+        <p:nvSpPr>
+          <p:cNvPr id="3" name="Notizenplatzhalter 2"/>
           <p:cNvSpPr>
             <a:spLocks noGrp="1"/>
           </p:cNvSpPr>
@@ -1257,24 +1247,36 @@
             <p:ph type="body" idx="1"/>
           </p:nvPr>
         </p:nvSpPr>
-        <p:spPr bwMode="auto">
-          <a:noFill/>
-        </p:spPr>
+        <p:spPr/>
         <p:txBody>
-          <a:bodyPr wrap="square" numCol="1" anchor="t" anchorCtr="0" compatLnSpc="1">
-            <a:prstTxWarp prst="textNoShape">
-              <a:avLst/>
-            </a:prstTxWarp>
-          </a:bodyPr>
+          <a:bodyPr/>
           <a:lstStyle/>
           <a:p>
-            <a:endParaRPr lang="de-DE" dirty="0"/>
+            <a:r>
+              <a:rPr lang="de-DE" b="0" i="0" dirty="0">
+                <a:solidFill>
+                  <a:srgbClr val="202122"/>
+                </a:solidFill>
+                <a:effectLst/>
+                <a:latin typeface="Arial" panose="020B0604020202020204" pitchFamily="34" charset="0"/>
+              </a:rPr>
+              <a:t>2004 Gründung des Jericho Forum. Bringt ZTN weiter voran indem Verlagerung der Netzwerkgrenzen thematisiert wird</a:t>
+            </a:r>
+          </a:p>
+          <a:p>
+            <a:endParaRPr lang="de-DE" b="0" i="0" dirty="0">
+              <a:solidFill>
+                <a:srgbClr val="202122"/>
+              </a:solidFill>
+              <a:effectLst/>
+              <a:latin typeface="Arial" panose="020B0604020202020204" pitchFamily="34" charset="0"/>
+            </a:endParaRPr>
           </a:p>
         </p:txBody>
       </p:sp>
       <p:sp>
         <p:nvSpPr>
-          <p:cNvPr id="13316" name="Foliennummernplatzhalter 3"/>
+          <p:cNvPr id="4" name="Foliennummernplatzhalter 3"/>
           <p:cNvSpPr>
             <a:spLocks noGrp="1"/>
           </p:cNvSpPr>
@@ -1282,26 +1284,20 @@
             <p:ph type="sldNum" sz="quarter" idx="5"/>
           </p:nvPr>
         </p:nvSpPr>
-        <p:spPr bwMode="auto">
-          <a:noFill/>
-          <a:ln>
-            <a:miter lim="800000"/>
-            <a:headEnd/>
-            <a:tailEnd/>
-          </a:ln>
-        </p:spPr>
+        <p:spPr/>
         <p:txBody>
-          <a:bodyPr wrap="square" numCol="1" anchorCtr="0" compatLnSpc="1">
-            <a:prstTxWarp prst="textNoShape">
-              <a:avLst/>
-            </a:prstTxWarp>
-          </a:bodyPr>
+          <a:bodyPr/>
           <a:lstStyle/>
           <a:p>
-            <a:fld id="{4EF057B4-36A5-43B9-BAE8-234CEF337EF4}" type="slidenum">
+            <a:pPr>
+              <a:defRPr/>
+            </a:pPr>
+            <a:fld id="{AAC84B72-5E29-43A7-9FEA-9C268482F579}" type="slidenum">
               <a:rPr lang="de-DE" smtClean="0"/>
-              <a:pPr/>
-              <a:t>10</a:t>
+              <a:pPr>
+                <a:defRPr/>
+              </a:pPr>
+              <a:t>4</a:t>
             </a:fld>
             <a:endParaRPr lang="de-DE" dirty="0"/>
           </a:p>
@@ -1310,7 +1306,7 @@
     </p:spTree>
     <p:extLst>
       <p:ext uri="{BB962C8B-B14F-4D97-AF65-F5344CB8AC3E}">
-        <p14:creationId xmlns:p14="http://schemas.microsoft.com/office/powerpoint/2010/main" val="2857486775"/>
+        <p14:creationId xmlns:p14="http://schemas.microsoft.com/office/powerpoint/2010/main" val="423901700"/>
       </p:ext>
     </p:extLst>
   </p:cSld>
@@ -1339,29 +1335,19 @@
       </p:grpSpPr>
       <p:sp>
         <p:nvSpPr>
-          <p:cNvPr id="13314" name="Folienbildplatzhalter 1"/>
+          <p:cNvPr id="2" name="Folienbildplatzhalter 1"/>
           <p:cNvSpPr>
-            <a:spLocks noGrp="1" noRot="1" noChangeAspect="1" noTextEdit="1"/>
+            <a:spLocks noGrp="1" noRot="1" noChangeAspect="1"/>
           </p:cNvSpPr>
           <p:nvPr>
             <p:ph type="sldImg"/>
           </p:nvPr>
         </p:nvSpPr>
-        <p:spPr bwMode="auto">
-          <a:noFill/>
-          <a:ln>
-            <a:solidFill>
-              <a:srgbClr val="000000"/>
-            </a:solidFill>
-            <a:miter lim="800000"/>
-            <a:headEnd/>
-            <a:tailEnd/>
-          </a:ln>
-        </p:spPr>
-      </p:sp>
-      <p:sp>
-        <p:nvSpPr>
-          <p:cNvPr id="13315" name="Notizenplatzhalter 2"/>
+        <p:spPr/>
+      </p:sp>
+      <p:sp>
+        <p:nvSpPr>
+          <p:cNvPr id="3" name="Notizenplatzhalter 2"/>
           <p:cNvSpPr>
             <a:spLocks noGrp="1"/>
           </p:cNvSpPr>
@@ -1369,24 +1355,133 @@
             <p:ph type="body" idx="1"/>
           </p:nvPr>
         </p:nvSpPr>
-        <p:spPr bwMode="auto">
-          <a:noFill/>
-        </p:spPr>
+        <p:spPr/>
         <p:txBody>
-          <a:bodyPr wrap="square" numCol="1" anchor="t" anchorCtr="0" compatLnSpc="1">
-            <a:prstTxWarp prst="textNoShape">
-              <a:avLst/>
-            </a:prstTxWarp>
-          </a:bodyPr>
+          <a:bodyPr/>
           <a:lstStyle/>
           <a:p>
+            <a:r>
+              <a:rPr lang="de-DE" dirty="0"/>
+              <a:t>NIST: 2010 Einheitliches </a:t>
+            </a:r>
+            <a:r>
+              <a:rPr lang="de-DE" b="0" i="0" dirty="0">
+                <a:solidFill>
+                  <a:srgbClr val="202122"/>
+                </a:solidFill>
+                <a:effectLst/>
+                <a:latin typeface="Arial" panose="020B0604020202020204" pitchFamily="34" charset="0"/>
+              </a:rPr>
+              <a:t>Framework für den Aufbau von Zero-Trust-Architekturen</a:t>
+            </a:r>
+          </a:p>
+          <a:p>
+            <a:endParaRPr lang="de-DE" b="0" i="0" dirty="0">
+              <a:solidFill>
+                <a:srgbClr val="202122"/>
+              </a:solidFill>
+              <a:effectLst/>
+              <a:latin typeface="Arial" panose="020B0604020202020204" pitchFamily="34" charset="0"/>
+            </a:endParaRPr>
+          </a:p>
+          <a:p>
+            <a:r>
+              <a:rPr lang="de-DE" b="0" i="0" dirty="0">
+                <a:solidFill>
+                  <a:srgbClr val="202122"/>
+                </a:solidFill>
+                <a:effectLst/>
+                <a:latin typeface="Arial" panose="020B0604020202020204" pitchFamily="34" charset="0"/>
+              </a:rPr>
+              <a:t>Google: wurde 2020 entwickelte. ist ein neues </a:t>
+            </a:r>
+            <a:r>
+              <a:rPr lang="de-DE" b="0" i="0" dirty="0" err="1">
+                <a:solidFill>
+                  <a:srgbClr val="202122"/>
+                </a:solidFill>
+                <a:effectLst/>
+                <a:latin typeface="Arial" panose="020B0604020202020204" pitchFamily="34" charset="0"/>
+              </a:rPr>
+              <a:t>sicherheitskonzept</a:t>
+            </a:r>
+            <a:r>
+              <a:rPr lang="de-DE" b="0" i="0" dirty="0">
+                <a:solidFill>
+                  <a:srgbClr val="202122"/>
+                </a:solidFill>
+                <a:effectLst/>
+                <a:latin typeface="Arial" panose="020B0604020202020204" pitchFamily="34" charset="0"/>
+              </a:rPr>
+              <a:t> auf </a:t>
+            </a:r>
+            <a:r>
+              <a:rPr lang="de-DE" b="0" i="0" dirty="0" err="1">
+                <a:solidFill>
+                  <a:srgbClr val="202122"/>
+                </a:solidFill>
+                <a:effectLst/>
+                <a:latin typeface="Arial" panose="020B0604020202020204" pitchFamily="34" charset="0"/>
+              </a:rPr>
+              <a:t>grundlage</a:t>
+            </a:r>
+            <a:r>
+              <a:rPr lang="de-DE" b="0" i="0" dirty="0">
+                <a:solidFill>
+                  <a:srgbClr val="202122"/>
+                </a:solidFill>
+                <a:effectLst/>
+                <a:latin typeface="Arial" panose="020B0604020202020204" pitchFamily="34" charset="0"/>
+              </a:rPr>
+              <a:t> von </a:t>
+            </a:r>
+            <a:r>
+              <a:rPr lang="de-DE" b="0" i="0" dirty="0" err="1">
+                <a:solidFill>
+                  <a:srgbClr val="202122"/>
+                </a:solidFill>
+                <a:effectLst/>
+                <a:latin typeface="Arial" panose="020B0604020202020204" pitchFamily="34" charset="0"/>
+              </a:rPr>
+              <a:t>zero</a:t>
+            </a:r>
+            <a:r>
+              <a:rPr lang="de-DE" b="0" i="0" dirty="0">
+                <a:solidFill>
+                  <a:srgbClr val="202122"/>
+                </a:solidFill>
+                <a:effectLst/>
+                <a:latin typeface="Arial" panose="020B0604020202020204" pitchFamily="34" charset="0"/>
+              </a:rPr>
+              <a:t> </a:t>
+            </a:r>
+            <a:r>
+              <a:rPr lang="de-DE" b="0" i="0" dirty="0" err="1">
+                <a:solidFill>
+                  <a:srgbClr val="202122"/>
+                </a:solidFill>
+                <a:effectLst/>
+                <a:latin typeface="Arial" panose="020B0604020202020204" pitchFamily="34" charset="0"/>
+              </a:rPr>
+              <a:t>trust</a:t>
+            </a:r>
+            <a:r>
+              <a:rPr lang="de-DE" b="0" i="0" dirty="0">
+                <a:solidFill>
+                  <a:srgbClr val="202122"/>
+                </a:solidFill>
+                <a:effectLst/>
+                <a:latin typeface="Arial" panose="020B0604020202020204" pitchFamily="34" charset="0"/>
+              </a:rPr>
+              <a:t> nach der Aurora-Angriffskampagne</a:t>
+            </a:r>
             <a:endParaRPr lang="de-DE" dirty="0"/>
           </a:p>
         </p:txBody>
       </p:sp>
       <p:sp>
         <p:nvSpPr>
-          <p:cNvPr id="13316" name="Foliennummernplatzhalter 3"/>
+          <p:cNvPr id="4" name="Foliennummernplatzhalter 3"/>
           <p:cNvSpPr>
             <a:spLocks noGrp="1"/>
           </p:cNvSpPr>
@@ -1394,26 +1489,20 @@
             <p:ph type="sldNum" sz="quarter" idx="5"/>
           </p:nvPr>
         </p:nvSpPr>
-        <p:spPr bwMode="auto">
-          <a:noFill/>
-          <a:ln>
-            <a:miter lim="800000"/>
-            <a:headEnd/>
-            <a:tailEnd/>
-          </a:ln>
-        </p:spPr>
+        <p:spPr/>
         <p:txBody>
-          <a:bodyPr wrap="square" numCol="1" anchorCtr="0" compatLnSpc="1">
-            <a:prstTxWarp prst="textNoShape">
-              <a:avLst/>
-            </a:prstTxWarp>
-          </a:bodyPr>
+          <a:bodyPr/>
           <a:lstStyle/>
           <a:p>
-            <a:fld id="{4EF057B4-36A5-43B9-BAE8-234CEF337EF4}" type="slidenum">
+            <a:pPr>
+              <a:defRPr/>
+            </a:pPr>
+            <a:fld id="{AAC84B72-5E29-43A7-9FEA-9C268482F579}" type="slidenum">
               <a:rPr lang="de-DE" smtClean="0"/>
-              <a:pPr/>
-              <a:t>11</a:t>
+              <a:pPr>
+                <a:defRPr/>
+              </a:pPr>
+              <a:t>5</a:t>
             </a:fld>
             <a:endParaRPr lang="de-DE" dirty="0"/>
           </a:p>
@@ -1422,7 +1511,484 @@
     </p:spTree>
     <p:extLst>
       <p:ext uri="{BB962C8B-B14F-4D97-AF65-F5344CB8AC3E}">
-        <p14:creationId xmlns:p14="http://schemas.microsoft.com/office/powerpoint/2010/main" val="1522183149"/>
+        <p14:creationId xmlns:p14="http://schemas.microsoft.com/office/powerpoint/2010/main" val="2050688198"/>
+      </p:ext>
+    </p:extLst>
+  </p:cSld>
+  <p:clrMapOvr>
+    <a:masterClrMapping/>
+  </p:clrMapOvr>
+</p:notes>
+</file>
+
+<file path=ppt/notesSlides/notesSlide5.xml><?xml version="1.0" encoding="utf-8"?>
+<p:notes xmlns:a="http://schemas.openxmlformats.org/drawingml/2006/main" xmlns:r="http://schemas.openxmlformats.org/officeDocument/2006/relationships" xmlns:p="http://schemas.openxmlformats.org/presentationml/2006/main">
+  <p:cSld>
+    <p:spTree>
+      <p:nvGrpSpPr>
+        <p:cNvPr id="1" name=""/>
+        <p:cNvGrpSpPr/>
+        <p:nvPr/>
+      </p:nvGrpSpPr>
+      <p:grpSpPr>
+        <a:xfrm>
+          <a:off x="0" y="0"/>
+          <a:ext cx="0" cy="0"/>
+          <a:chOff x="0" y="0"/>
+          <a:chExt cx="0" cy="0"/>
+        </a:xfrm>
+      </p:grpSpPr>
+      <p:sp>
+        <p:nvSpPr>
+          <p:cNvPr id="2" name="Folienbildplatzhalter 1"/>
+          <p:cNvSpPr>
+            <a:spLocks noGrp="1" noRot="1" noChangeAspect="1"/>
+          </p:cNvSpPr>
+          <p:nvPr>
+            <p:ph type="sldImg"/>
+          </p:nvPr>
+        </p:nvSpPr>
+        <p:spPr/>
+      </p:sp>
+      <p:sp>
+        <p:nvSpPr>
+          <p:cNvPr id="3" name="Notizenplatzhalter 2"/>
+          <p:cNvSpPr>
+            <a:spLocks noGrp="1"/>
+          </p:cNvSpPr>
+          <p:nvPr>
+            <p:ph type="body" idx="1"/>
+          </p:nvPr>
+        </p:nvSpPr>
+        <p:spPr/>
+        <p:txBody>
+          <a:bodyPr/>
+          <a:lstStyle/>
+          <a:p>
+            <a:pPr marL="342900" indent="-342900">
+              <a:buFont typeface="Arial" panose="020B0604020202020204" pitchFamily="34" charset="0"/>
+              <a:buChar char="•"/>
+            </a:pPr>
+            <a:r>
+              <a:rPr lang="de-DE" dirty="0"/>
+              <a:t>Never </a:t>
+            </a:r>
+            <a:r>
+              <a:rPr lang="de-DE" dirty="0" err="1"/>
+              <a:t>trust</a:t>
+            </a:r>
+            <a:r>
+              <a:rPr lang="de-DE" dirty="0"/>
+              <a:t> – </a:t>
+            </a:r>
+            <a:r>
+              <a:rPr lang="de-DE" dirty="0" err="1"/>
+              <a:t>always</a:t>
+            </a:r>
+            <a:r>
+              <a:rPr lang="de-DE" dirty="0"/>
+              <a:t> </a:t>
+            </a:r>
+            <a:r>
+              <a:rPr lang="de-DE" dirty="0" err="1"/>
+              <a:t>verify</a:t>
+            </a:r>
+            <a:endParaRPr lang="de-DE" dirty="0"/>
+          </a:p>
+          <a:p>
+            <a:pPr marL="342900" indent="-342900">
+              <a:buFont typeface="Arial" panose="020B0604020202020204" pitchFamily="34" charset="0"/>
+              <a:buChar char="•"/>
+            </a:pPr>
+            <a:r>
+              <a:rPr lang="de-DE" dirty="0"/>
+              <a:t>Least </a:t>
+            </a:r>
+            <a:r>
+              <a:rPr lang="de-DE" dirty="0" err="1"/>
+              <a:t>privilege</a:t>
+            </a:r>
+            <a:endParaRPr lang="de-DE" dirty="0"/>
+          </a:p>
+          <a:p>
+            <a:pPr marL="342900" indent="-342900">
+              <a:buFont typeface="Arial" panose="020B0604020202020204" pitchFamily="34" charset="0"/>
+              <a:buChar char="•"/>
+            </a:pPr>
+            <a:r>
+              <a:rPr lang="de-DE" dirty="0"/>
+              <a:t>Micro </a:t>
+            </a:r>
+            <a:r>
+              <a:rPr lang="de-DE" dirty="0" err="1"/>
+              <a:t>segmentation</a:t>
+            </a:r>
+            <a:endParaRPr lang="de-DE" dirty="0"/>
+          </a:p>
+          <a:p>
+            <a:pPr marL="342900" indent="-342900">
+              <a:buFont typeface="Arial" panose="020B0604020202020204" pitchFamily="34" charset="0"/>
+              <a:buChar char="•"/>
+            </a:pPr>
+            <a:r>
+              <a:rPr lang="de-DE" dirty="0" err="1"/>
+              <a:t>Assume</a:t>
+            </a:r>
+            <a:r>
+              <a:rPr lang="de-DE" dirty="0"/>
+              <a:t> </a:t>
+            </a:r>
+            <a:r>
+              <a:rPr lang="de-DE" dirty="0" err="1"/>
+              <a:t>breach</a:t>
+            </a:r>
+            <a:endParaRPr lang="de-DE" dirty="0"/>
+          </a:p>
+          <a:p>
+            <a:endParaRPr lang="de-DE" dirty="0"/>
+          </a:p>
+        </p:txBody>
+      </p:sp>
+      <p:sp>
+        <p:nvSpPr>
+          <p:cNvPr id="4" name="Foliennummernplatzhalter 3"/>
+          <p:cNvSpPr>
+            <a:spLocks noGrp="1"/>
+          </p:cNvSpPr>
+          <p:nvPr>
+            <p:ph type="sldNum" sz="quarter" idx="5"/>
+          </p:nvPr>
+        </p:nvSpPr>
+        <p:spPr/>
+        <p:txBody>
+          <a:bodyPr/>
+          <a:lstStyle/>
+          <a:p>
+            <a:pPr>
+              <a:defRPr/>
+            </a:pPr>
+            <a:fld id="{AAC84B72-5E29-43A7-9FEA-9C268482F579}" type="slidenum">
+              <a:rPr lang="de-DE" smtClean="0"/>
+              <a:pPr>
+                <a:defRPr/>
+              </a:pPr>
+              <a:t>7</a:t>
+            </a:fld>
+            <a:endParaRPr lang="de-DE" dirty="0"/>
+          </a:p>
+        </p:txBody>
+      </p:sp>
+    </p:spTree>
+    <p:extLst>
+      <p:ext uri="{BB962C8B-B14F-4D97-AF65-F5344CB8AC3E}">
+        <p14:creationId xmlns:p14="http://schemas.microsoft.com/office/powerpoint/2010/main" val="586587971"/>
+      </p:ext>
+    </p:extLst>
+  </p:cSld>
+  <p:clrMapOvr>
+    <a:masterClrMapping/>
+  </p:clrMapOvr>
+</p:notes>
+</file>
+
+<file path=ppt/notesSlides/notesSlide6.xml><?xml version="1.0" encoding="utf-8"?>
+<p:notes xmlns:a="http://schemas.openxmlformats.org/drawingml/2006/main" xmlns:r="http://schemas.openxmlformats.org/officeDocument/2006/relationships" xmlns:p="http://schemas.openxmlformats.org/presentationml/2006/main">
+  <p:cSld>
+    <p:spTree>
+      <p:nvGrpSpPr>
+        <p:cNvPr id="1" name=""/>
+        <p:cNvGrpSpPr/>
+        <p:nvPr/>
+      </p:nvGrpSpPr>
+      <p:grpSpPr>
+        <a:xfrm>
+          <a:off x="0" y="0"/>
+          <a:ext cx="0" cy="0"/>
+          <a:chOff x="0" y="0"/>
+          <a:chExt cx="0" cy="0"/>
+        </a:xfrm>
+      </p:grpSpPr>
+      <p:sp>
+        <p:nvSpPr>
+          <p:cNvPr id="2" name="Folienbildplatzhalter 1"/>
+          <p:cNvSpPr>
+            <a:spLocks noGrp="1" noRot="1" noChangeAspect="1"/>
+          </p:cNvSpPr>
+          <p:nvPr>
+            <p:ph type="sldImg"/>
+          </p:nvPr>
+        </p:nvSpPr>
+        <p:spPr/>
+      </p:sp>
+      <p:sp>
+        <p:nvSpPr>
+          <p:cNvPr id="3" name="Notizenplatzhalter 2"/>
+          <p:cNvSpPr>
+            <a:spLocks noGrp="1"/>
+          </p:cNvSpPr>
+          <p:nvPr>
+            <p:ph type="body" idx="1"/>
+          </p:nvPr>
+        </p:nvSpPr>
+        <p:spPr/>
+        <p:txBody>
+          <a:bodyPr/>
+          <a:lstStyle/>
+          <a:p>
+            <a:endParaRPr lang="de-DE" dirty="0"/>
+          </a:p>
+        </p:txBody>
+      </p:sp>
+      <p:sp>
+        <p:nvSpPr>
+          <p:cNvPr id="4" name="Foliennummernplatzhalter 3"/>
+          <p:cNvSpPr>
+            <a:spLocks noGrp="1"/>
+          </p:cNvSpPr>
+          <p:nvPr>
+            <p:ph type="sldNum" sz="quarter" idx="5"/>
+          </p:nvPr>
+        </p:nvSpPr>
+        <p:spPr/>
+        <p:txBody>
+          <a:bodyPr/>
+          <a:lstStyle/>
+          <a:p>
+            <a:pPr>
+              <a:defRPr/>
+            </a:pPr>
+            <a:fld id="{AAC84B72-5E29-43A7-9FEA-9C268482F579}" type="slidenum">
+              <a:rPr lang="de-DE" smtClean="0"/>
+              <a:pPr>
+                <a:defRPr/>
+              </a:pPr>
+              <a:t>9</a:t>
+            </a:fld>
+            <a:endParaRPr lang="de-DE" dirty="0"/>
+          </a:p>
+        </p:txBody>
+      </p:sp>
+    </p:spTree>
+    <p:extLst>
+      <p:ext uri="{BB962C8B-B14F-4D97-AF65-F5344CB8AC3E}">
+        <p14:creationId xmlns:p14="http://schemas.microsoft.com/office/powerpoint/2010/main" val="787880454"/>
+      </p:ext>
+    </p:extLst>
+  </p:cSld>
+  <p:clrMapOvr>
+    <a:masterClrMapping/>
+  </p:clrMapOvr>
+</p:notes>
+</file>
+
+<file path=ppt/notesSlides/notesSlide7.xml><?xml version="1.0" encoding="utf-8"?>
+<p:notes xmlns:a="http://schemas.openxmlformats.org/drawingml/2006/main" xmlns:r="http://schemas.openxmlformats.org/officeDocument/2006/relationships" xmlns:p="http://schemas.openxmlformats.org/presentationml/2006/main">
+  <p:cSld>
+    <p:spTree>
+      <p:nvGrpSpPr>
+        <p:cNvPr id="1" name=""/>
+        <p:cNvGrpSpPr/>
+        <p:nvPr/>
+      </p:nvGrpSpPr>
+      <p:grpSpPr>
+        <a:xfrm>
+          <a:off x="0" y="0"/>
+          <a:ext cx="0" cy="0"/>
+          <a:chOff x="0" y="0"/>
+          <a:chExt cx="0" cy="0"/>
+        </a:xfrm>
+      </p:grpSpPr>
+      <p:sp>
+        <p:nvSpPr>
+          <p:cNvPr id="2" name="Folienbildplatzhalter 1"/>
+          <p:cNvSpPr>
+            <a:spLocks noGrp="1" noRot="1" noChangeAspect="1"/>
+          </p:cNvSpPr>
+          <p:nvPr>
+            <p:ph type="sldImg"/>
+          </p:nvPr>
+        </p:nvSpPr>
+        <p:spPr/>
+      </p:sp>
+      <p:sp>
+        <p:nvSpPr>
+          <p:cNvPr id="3" name="Notizenplatzhalter 2"/>
+          <p:cNvSpPr>
+            <a:spLocks noGrp="1"/>
+          </p:cNvSpPr>
+          <p:nvPr>
+            <p:ph type="body" idx="1"/>
+          </p:nvPr>
+        </p:nvSpPr>
+        <p:spPr/>
+        <p:txBody>
+          <a:bodyPr/>
+          <a:lstStyle/>
+          <a:p>
+            <a:r>
+              <a:rPr lang="de-DE" dirty="0"/>
+              <a:t>1: Schwerpunkt liegt auf Cloud Computing. Bei mir hybrider Ansatz</a:t>
+            </a:r>
+          </a:p>
+          <a:p>
+            <a:r>
+              <a:rPr lang="de-DE" dirty="0"/>
+              <a:t>Zudem wird hier Modelle und Frameworks verglichen. Bei mir erfolgt eine praxisorientiere </a:t>
+            </a:r>
+            <a:r>
+              <a:rPr lang="de-DE" dirty="0" err="1"/>
+              <a:t>arbeit</a:t>
+            </a:r>
+            <a:r>
+              <a:rPr lang="de-DE" dirty="0"/>
+              <a:t> mit eigenem </a:t>
+            </a:r>
+            <a:r>
+              <a:rPr lang="de-DE" dirty="0" err="1"/>
+              <a:t>proof</a:t>
+            </a:r>
+            <a:r>
+              <a:rPr lang="de-DE" dirty="0"/>
+              <a:t> </a:t>
+            </a:r>
+            <a:r>
+              <a:rPr lang="de-DE" dirty="0" err="1"/>
+              <a:t>of</a:t>
+            </a:r>
+            <a:r>
+              <a:rPr lang="de-DE" dirty="0"/>
+              <a:t> </a:t>
+            </a:r>
+            <a:r>
+              <a:rPr lang="de-DE" dirty="0" err="1"/>
+              <a:t>concept</a:t>
+            </a:r>
+            <a:endParaRPr lang="de-DE" dirty="0"/>
+          </a:p>
+          <a:p>
+            <a:endParaRPr lang="de-DE" dirty="0"/>
+          </a:p>
+          <a:p>
+            <a:r>
+              <a:rPr lang="de-DE" dirty="0"/>
+              <a:t>2: Arbeit ist eine </a:t>
+            </a:r>
+            <a:r>
+              <a:rPr lang="de-DE" dirty="0" err="1"/>
+              <a:t>Kombia</a:t>
+            </a:r>
+            <a:r>
+              <a:rPr lang="de-DE" dirty="0"/>
+              <a:t> aus wissenschaftlichen Literaturen und </a:t>
+            </a:r>
+            <a:r>
+              <a:rPr lang="de-DE" dirty="0" err="1"/>
+              <a:t>Prasisberichten</a:t>
+            </a:r>
+            <a:r>
+              <a:rPr lang="de-DE" dirty="0"/>
+              <a:t>. Hier auch wieder </a:t>
+            </a:r>
+            <a:r>
+              <a:rPr lang="de-DE" dirty="0" err="1"/>
+              <a:t>proof</a:t>
+            </a:r>
+            <a:r>
+              <a:rPr lang="de-DE" dirty="0"/>
+              <a:t> </a:t>
+            </a:r>
+            <a:r>
+              <a:rPr lang="de-DE" dirty="0" err="1"/>
+              <a:t>of</a:t>
+            </a:r>
+            <a:r>
+              <a:rPr lang="de-DE" dirty="0"/>
+              <a:t> </a:t>
+            </a:r>
+            <a:r>
+              <a:rPr lang="de-DE" dirty="0" err="1"/>
+              <a:t>concept</a:t>
+            </a:r>
+            <a:r>
+              <a:rPr lang="de-DE" dirty="0"/>
+              <a:t> du </a:t>
+            </a:r>
+            <a:r>
+              <a:rPr lang="de-DE" dirty="0" err="1"/>
+              <a:t>lessons</a:t>
+            </a:r>
+            <a:r>
+              <a:rPr lang="de-DE" dirty="0"/>
+              <a:t> </a:t>
+            </a:r>
+            <a:r>
+              <a:rPr lang="de-DE" dirty="0" err="1"/>
+              <a:t>learnd</a:t>
+            </a:r>
+            <a:r>
+              <a:rPr lang="de-DE" dirty="0"/>
+              <a:t>. Allgemeine Betrachtung ohne bestimmte </a:t>
+            </a:r>
+            <a:r>
+              <a:rPr lang="de-DE" dirty="0" err="1"/>
+              <a:t>tools</a:t>
+            </a:r>
+            <a:r>
+              <a:rPr lang="de-DE" dirty="0"/>
+              <a:t>. Bei mir </a:t>
+            </a:r>
+            <a:r>
+              <a:rPr lang="de-DE" dirty="0" err="1"/>
+              <a:t>fokus</a:t>
+            </a:r>
+            <a:r>
+              <a:rPr lang="de-DE" dirty="0"/>
+              <a:t> auf </a:t>
+            </a:r>
+            <a:r>
+              <a:rPr lang="de-DE" dirty="0" err="1"/>
+              <a:t>fortinet</a:t>
+            </a:r>
+            <a:endParaRPr lang="de-DE" dirty="0"/>
+          </a:p>
+          <a:p>
+            <a:endParaRPr lang="de-DE" dirty="0"/>
+          </a:p>
+        </p:txBody>
+      </p:sp>
+      <p:sp>
+        <p:nvSpPr>
+          <p:cNvPr id="4" name="Foliennummernplatzhalter 3"/>
+          <p:cNvSpPr>
+            <a:spLocks noGrp="1"/>
+          </p:cNvSpPr>
+          <p:nvPr>
+            <p:ph type="sldNum" sz="quarter" idx="5"/>
+          </p:nvPr>
+        </p:nvSpPr>
+        <p:spPr/>
+        <p:txBody>
+          <a:bodyPr/>
+          <a:lstStyle/>
+          <a:p>
+            <a:pPr>
+              <a:defRPr/>
+            </a:pPr>
+            <a:fld id="{AAC84B72-5E29-43A7-9FEA-9C268482F579}" type="slidenum">
+              <a:rPr lang="de-DE" smtClean="0"/>
+              <a:pPr>
+                <a:defRPr/>
+              </a:pPr>
+              <a:t>10</a:t>
+            </a:fld>
+            <a:endParaRPr lang="de-DE" dirty="0"/>
+          </a:p>
+        </p:txBody>
+      </p:sp>
+    </p:spTree>
+    <p:extLst>
+      <p:ext uri="{BB962C8B-B14F-4D97-AF65-F5344CB8AC3E}">
+        <p14:creationId xmlns:p14="http://schemas.microsoft.com/office/powerpoint/2010/main" val="1947789378"/>
       </p:ext>
     </p:extLst>
   </p:cSld>
@@ -3073,7 +3639,13 @@
       </p:grpSpPr>
       <p:sp>
         <p:nvSpPr>
-          <p:cNvPr id="8194" name="Titel 6"/>
+          <p:cNvPr id="2" name="Titel 1">
+            <a:extLst>
+              <a:ext uri="{FF2B5EF4-FFF2-40B4-BE49-F238E27FC236}">
+                <a16:creationId xmlns:a16="http://schemas.microsoft.com/office/drawing/2014/main" id="{459502B1-CF46-70C6-D6DE-641574FAAB28}"/>
+              </a:ext>
+            </a:extLst>
+          </p:cNvPr>
           <p:cNvSpPr>
             <a:spLocks noGrp="1"/>
           </p:cNvSpPr>
@@ -3088,14 +3660,20 @@
           <a:p>
             <a:r>
               <a:rPr lang="de-DE" dirty="0"/>
-              <a:t>Struktur</a:t>
+              <a:t>Ähnliche Arbeiten</a:t>
             </a:r>
           </a:p>
         </p:txBody>
       </p:sp>
       <p:sp>
         <p:nvSpPr>
-          <p:cNvPr id="6" name="Inhaltsplatzhalter 5"/>
+          <p:cNvPr id="3" name="Inhaltsplatzhalter 2">
+            <a:extLst>
+              <a:ext uri="{FF2B5EF4-FFF2-40B4-BE49-F238E27FC236}">
+                <a16:creationId xmlns:a16="http://schemas.microsoft.com/office/drawing/2014/main" id="{9864D2B7-575B-D770-0679-035A650D5DE6}"/>
+              </a:ext>
+            </a:extLst>
+          </p:cNvPr>
           <p:cNvSpPr>
             <a:spLocks noGrp="1"/>
           </p:cNvSpPr>
@@ -3108,117 +3686,123 @@
           <a:bodyPr/>
           <a:lstStyle/>
           <a:p>
-            <a:pPr lvl="1"/>
-            <a:r>
-              <a:rPr lang="de-DE" dirty="0"/>
-              <a:t>Langer Vortrag </a:t>
-            </a:r>
-          </a:p>
-          <a:p>
-            <a:pPr lvl="2"/>
-            <a:r>
-              <a:rPr lang="de-DE" dirty="0"/>
-              <a:t>Dauer</a:t>
-            </a:r>
-          </a:p>
-          <a:p>
-            <a:pPr lvl="3"/>
-            <a:r>
-              <a:rPr lang="de-DE" dirty="0"/>
-              <a:t>20 Minuten, davon gut 15 Min Vortrag und der Rest für Fragen</a:t>
-            </a:r>
-          </a:p>
-          <a:p>
-            <a:pPr lvl="2"/>
-            <a:r>
-              <a:rPr lang="de-DE" dirty="0"/>
-              <a:t>Aufbau (grob)</a:t>
-            </a:r>
-          </a:p>
-          <a:p>
-            <a:pPr lvl="3"/>
-            <a:r>
-              <a:rPr lang="de-DE" dirty="0"/>
-              <a:t>Gliederung</a:t>
-            </a:r>
-          </a:p>
-          <a:p>
-            <a:pPr lvl="3"/>
-            <a:r>
-              <a:rPr lang="de-DE" dirty="0"/>
-              <a:t>Aufgabenstellung (Welches Problem soll gelöst werden?)</a:t>
-            </a:r>
-          </a:p>
-          <a:p>
-            <a:pPr lvl="3"/>
-            <a:r>
-              <a:rPr lang="de-DE" dirty="0"/>
-              <a:t>Umsetzung (Wie wurde das Problem gelöst?)</a:t>
-            </a:r>
-          </a:p>
-          <a:p>
-            <a:pPr lvl="3"/>
-            <a:r>
-              <a:rPr lang="de-DE" dirty="0"/>
-              <a:t>Ergebnisse</a:t>
-            </a:r>
-          </a:p>
-          <a:p>
-            <a:pPr lvl="3"/>
-            <a:r>
-              <a:rPr lang="de-DE" dirty="0"/>
-              <a:t>Zusammenfassung</a:t>
-            </a:r>
-          </a:p>
-          <a:p>
-            <a:pPr lvl="1"/>
-            <a:r>
-              <a:rPr lang="de-DE" dirty="0"/>
-              <a:t>Kurzer Vortrag</a:t>
-            </a:r>
-          </a:p>
-          <a:p>
-            <a:pPr lvl="2"/>
-            <a:r>
-              <a:rPr lang="de-DE" dirty="0"/>
-              <a:t>Dauer</a:t>
-            </a:r>
-          </a:p>
-          <a:p>
-            <a:pPr lvl="3"/>
-            <a:r>
-              <a:rPr lang="de-DE" dirty="0"/>
-              <a:t>insgesamt 10 Min mit Raum für 1-2 Fragen</a:t>
-            </a:r>
-          </a:p>
-          <a:p>
-            <a:pPr lvl="2"/>
-            <a:r>
-              <a:rPr lang="de-DE" dirty="0"/>
-              <a:t>Aufbau</a:t>
-            </a:r>
-          </a:p>
-          <a:p>
-            <a:pPr lvl="3"/>
-            <a:r>
-              <a:rPr lang="de-DE" dirty="0"/>
-              <a:t>Aufgabenstellung (Welches Problem soll gelöst werden?)</a:t>
-            </a:r>
-          </a:p>
-          <a:p>
-            <a:pPr lvl="3"/>
-            <a:r>
-              <a:rPr lang="de-DE" dirty="0"/>
-              <a:t>Vorgehen / Erste Ergebnisse</a:t>
-            </a:r>
-          </a:p>
-          <a:p>
-            <a:pPr lvl="2"/>
-            <a:endParaRPr lang="de-DE" dirty="0"/>
+            <a:pPr marL="342900" indent="-342900">
+              <a:buFont typeface="Arial" panose="020B0604020202020204" pitchFamily="34" charset="0"/>
+              <a:buChar char="•"/>
+            </a:pPr>
+            <a:r>
+              <a:rPr lang="en-US" dirty="0"/>
+              <a:t>Sarkar, S.; Choudhary, G.; Shandilya, SK; Hussain, A.; Kim, H. Sicherheit von Zero-Trust-</a:t>
+            </a:r>
+            <a:r>
+              <a:rPr lang="en-US" dirty="0" err="1"/>
+              <a:t>Netzwerken</a:t>
+            </a:r>
+            <a:r>
+              <a:rPr lang="en-US" dirty="0"/>
+              <a:t> </a:t>
+            </a:r>
+            <a:r>
+              <a:rPr lang="en-US" dirty="0" err="1"/>
+              <a:t>im</a:t>
+            </a:r>
+            <a:r>
+              <a:rPr lang="en-US" dirty="0"/>
+              <a:t> Cloud Computing: Ein </a:t>
+            </a:r>
+            <a:r>
+              <a:rPr lang="en-US" dirty="0" err="1"/>
+              <a:t>vergleichender</a:t>
+            </a:r>
+            <a:r>
+              <a:rPr lang="en-US" dirty="0"/>
+              <a:t> </a:t>
+            </a:r>
+            <a:r>
+              <a:rPr lang="en-US" dirty="0" err="1"/>
+              <a:t>Überblick</a:t>
+            </a:r>
+            <a:r>
+              <a:rPr lang="en-US" dirty="0"/>
+              <a:t>. Sustainability 2022 , 14 , 11213. </a:t>
+            </a:r>
+            <a:r>
+              <a:rPr lang="en-US" sz="1800" dirty="0">
+                <a:hlinkClick r:id="rId3" tooltip="https://doi.org/10.3390/su141811213"/>
+              </a:rPr>
+              <a:t>https://doi.org/10.3390/su141811213</a:t>
+            </a:r>
+            <a:endParaRPr lang="en-US" sz="1800" dirty="0"/>
+          </a:p>
+          <a:p>
+            <a:pPr marL="342900" indent="-342900">
+              <a:buFont typeface="Arial" panose="020B0604020202020204" pitchFamily="34" charset="0"/>
+              <a:buChar char="•"/>
+            </a:pPr>
+            <a:endParaRPr lang="en-US" sz="1800" dirty="0"/>
+          </a:p>
+          <a:p>
+            <a:pPr marL="342900" indent="-342900">
+              <a:buFont typeface="Arial" panose="020B0604020202020204" pitchFamily="34" charset="0"/>
+              <a:buChar char="•"/>
+            </a:pPr>
+            <a:r>
+              <a:rPr lang="en-US" dirty="0"/>
+              <a:t>Cornelius </a:t>
+            </a:r>
+            <a:r>
+              <a:rPr lang="en-US" dirty="0" err="1"/>
+              <a:t>Itodo</a:t>
+            </a:r>
+            <a:r>
+              <a:rPr lang="en-US" dirty="0"/>
+              <a:t>, Murat Ozer, Multivocal literature review on zero-trust security implementation, Computers &amp; Security, Volume 141, 2024, 103827, ISSN 0167-4048</a:t>
+            </a:r>
+            <a:r>
+              <a:rPr lang="en-US" dirty="0">
+                <a:solidFill>
+                  <a:srgbClr val="1F1F1F"/>
+                </a:solidFill>
+                <a:latin typeface="ElsevierGulliver"/>
+              </a:rPr>
+              <a:t> </a:t>
+            </a:r>
+            <a:r>
+              <a:rPr lang="en-US" b="0" i="0" dirty="0">
+                <a:solidFill>
+                  <a:srgbClr val="1F1F1F"/>
+                </a:solidFill>
+                <a:effectLst/>
+                <a:latin typeface="ElsevierGulliver"/>
+                <a:hlinkClick r:id="rId4"/>
+              </a:rPr>
+              <a:t>https://doi.org/10.1016/j.cose.2024.103827</a:t>
+            </a:r>
+            <a:br>
+              <a:rPr lang="en-US" b="0" i="0" dirty="0">
+                <a:solidFill>
+                  <a:srgbClr val="1F1F1F"/>
+                </a:solidFill>
+                <a:effectLst/>
+                <a:latin typeface="ElsevierGulliver"/>
+              </a:rPr>
+            </a:br>
+            <a:endParaRPr lang="en-US" b="0" i="0" dirty="0">
+              <a:solidFill>
+                <a:srgbClr val="1F1F1F"/>
+              </a:solidFill>
+              <a:effectLst/>
+              <a:latin typeface="ElsevierGulliver"/>
+            </a:endParaRPr>
           </a:p>
         </p:txBody>
       </p:sp>
     </p:spTree>
+    <p:extLst>
+      <p:ext uri="{BB962C8B-B14F-4D97-AF65-F5344CB8AC3E}">
+        <p14:creationId xmlns:p14="http://schemas.microsoft.com/office/powerpoint/2010/main" val="2480421540"/>
+      </p:ext>
+    </p:extLst>
   </p:cSld>
   <p:clrMapOvr>
     <a:masterClrMapping/>
@@ -3245,7 +3829,13 @@
       </p:grpSpPr>
       <p:sp>
         <p:nvSpPr>
-          <p:cNvPr id="8194" name="Titel 6"/>
+          <p:cNvPr id="2" name="Titel 1">
+            <a:extLst>
+              <a:ext uri="{FF2B5EF4-FFF2-40B4-BE49-F238E27FC236}">
+                <a16:creationId xmlns:a16="http://schemas.microsoft.com/office/drawing/2014/main" id="{A8E6830E-9A45-A887-42BC-0CBB6FCB5047}"/>
+              </a:ext>
+            </a:extLst>
+          </p:cNvPr>
           <p:cNvSpPr>
             <a:spLocks noGrp="1"/>
           </p:cNvSpPr>
@@ -3260,14 +3850,20 @@
           <a:p>
             <a:r>
               <a:rPr lang="de-DE" dirty="0"/>
-              <a:t>Template Benutzen (hier PPT 2013)</a:t>
+              <a:t>Danke fürs Zuhören</a:t>
             </a:r>
           </a:p>
         </p:txBody>
       </p:sp>
       <p:sp>
         <p:nvSpPr>
-          <p:cNvPr id="6" name="Inhaltsplatzhalter 5"/>
+          <p:cNvPr id="3" name="Inhaltsplatzhalter 2">
+            <a:extLst>
+              <a:ext uri="{FF2B5EF4-FFF2-40B4-BE49-F238E27FC236}">
+                <a16:creationId xmlns:a16="http://schemas.microsoft.com/office/drawing/2014/main" id="{ACC54CA0-ED25-B9C8-C7D7-6B72C183A475}"/>
+              </a:ext>
+            </a:extLst>
+          </p:cNvPr>
           <p:cNvSpPr>
             <a:spLocks noGrp="1"/>
           </p:cNvSpPr>
@@ -3275,194 +3871,41 @@
             <p:ph idx="1"/>
           </p:nvPr>
         </p:nvSpPr>
-        <p:spPr>
-          <a:xfrm>
-            <a:off x="244456" y="1306885"/>
-            <a:ext cx="8402109" cy="5040000"/>
-          </a:xfrm>
-        </p:spPr>
+        <p:spPr/>
         <p:txBody>
           <a:bodyPr/>
           <a:lstStyle/>
           <a:p>
-            <a:pPr lvl="1">
-              <a:buNone/>
-            </a:pPr>
-            <a:r>
-              <a:rPr lang="de-DE" dirty="0"/>
-              <a:t>Wichtigste Punkte:</a:t>
-            </a:r>
-          </a:p>
-          <a:p>
-            <a:pPr lvl="1"/>
-            <a:r>
-              <a:rPr lang="de-DE" dirty="0"/>
-              <a:t>Layout</a:t>
-            </a:r>
-          </a:p>
-          <a:p>
-            <a:pPr lvl="2"/>
-            <a:r>
-              <a:rPr lang="de-DE" dirty="0"/>
-              <a:t>neue Folien einfügen</a:t>
-            </a:r>
-          </a:p>
-          <a:p>
-            <a:pPr lvl="2"/>
-            <a:r>
-              <a:rPr lang="de-DE" dirty="0"/>
-              <a:t>ein oder zweispaltig vorgegeben</a:t>
-            </a:r>
-          </a:p>
-          <a:p>
-            <a:pPr lvl="2"/>
-            <a:r>
-              <a:rPr lang="de-DE" dirty="0"/>
-              <a:t>mit „zurücksetzen“ fehlerhaftes Layout korrigieren</a:t>
-            </a:r>
-          </a:p>
-          <a:p>
-            <a:pPr lvl="1"/>
-            <a:r>
-              <a:rPr lang="de-DE" dirty="0"/>
-              <a:t>mit       (unter Absatz) </a:t>
-            </a:r>
-            <a:r>
-              <a:rPr lang="de-DE" dirty="0" err="1"/>
-              <a:t>Bulletpoints</a:t>
-            </a:r>
-            <a:r>
-              <a:rPr lang="de-DE" dirty="0"/>
-              <a:t> generieren</a:t>
-            </a:r>
-          </a:p>
-          <a:p>
-            <a:pPr lvl="2"/>
-            <a:r>
-              <a:rPr lang="de-DE" dirty="0"/>
-              <a:t>Ebene rauf und runter</a:t>
-            </a:r>
-          </a:p>
-          <a:p>
-            <a:pPr lvl="1"/>
-            <a:r>
-              <a:rPr lang="de-DE" dirty="0"/>
-              <a:t>Masterfolie (wegen Fußzeile)</a:t>
-            </a:r>
-          </a:p>
-          <a:p>
-            <a:pPr lvl="2"/>
-            <a:r>
-              <a:rPr lang="de-DE" dirty="0"/>
-              <a:t>findet sich unter Ansicht/Folienmaster</a:t>
-            </a:r>
-          </a:p>
-          <a:p>
-            <a:pPr lvl="2"/>
-            <a:r>
-              <a:rPr lang="de-DE" dirty="0"/>
-              <a:t>in Hauptfolie editierbar</a:t>
-            </a:r>
-          </a:p>
-          <a:p>
-            <a:pPr lvl="1"/>
-            <a:endParaRPr lang="de-DE" dirty="0"/>
-          </a:p>
-          <a:p>
-            <a:pPr lvl="1"/>
-            <a:r>
-              <a:rPr lang="de-DE" dirty="0"/>
-              <a:t>Bei Formatierungsproblemen: Rücksprache Schuba</a:t>
-            </a:r>
-          </a:p>
-          <a:p>
-            <a:pPr lvl="2"/>
-            <a:endParaRPr lang="de-DE" dirty="0"/>
+            <a:pPr algn="ctr"/>
+            <a:endParaRPr lang="de-DE" dirty="0"/>
+          </a:p>
+          <a:p>
+            <a:pPr algn="ctr"/>
+            <a:endParaRPr lang="de-DE" dirty="0"/>
+          </a:p>
+          <a:p>
+            <a:pPr algn="ctr"/>
+            <a:endParaRPr lang="de-DE" dirty="0"/>
+          </a:p>
+          <a:p>
+            <a:pPr algn="ctr"/>
+            <a:endParaRPr lang="de-DE" dirty="0"/>
+          </a:p>
+          <a:p>
+            <a:pPr algn="ctr"/>
+            <a:r>
+              <a:rPr lang="de-DE" dirty="0"/>
+              <a:t>Fragen?</a:t>
+            </a:r>
           </a:p>
         </p:txBody>
       </p:sp>
-      <p:pic>
-        <p:nvPicPr>
-          <p:cNvPr id="1029" name="Picture 5"/>
-          <p:cNvPicPr>
-            <a:picLocks noChangeAspect="1" noChangeArrowheads="1"/>
-          </p:cNvPicPr>
-          <p:nvPr/>
-        </p:nvPicPr>
-        <p:blipFill>
-          <a:blip r:embed="rId3"/>
-          <a:srcRect/>
-          <a:stretch>
-            <a:fillRect/>
-          </a:stretch>
-        </p:blipFill>
-        <p:spPr bwMode="auto">
-          <a:xfrm>
-            <a:off x="6335723" y="4337900"/>
-            <a:ext cx="1474281" cy="1611669"/>
-          </a:xfrm>
-          <a:prstGeom prst="rect">
-            <a:avLst/>
-          </a:prstGeom>
-          <a:noFill/>
-          <a:ln w="9525">
-            <a:noFill/>
-            <a:miter lim="800000"/>
-            <a:headEnd/>
-            <a:tailEnd/>
-          </a:ln>
-          <a:effectLst/>
-        </p:spPr>
-      </p:pic>
-      <p:pic>
-        <p:nvPicPr>
-          <p:cNvPr id="2" name="Grafik 1"/>
-          <p:cNvPicPr>
-            <a:picLocks noChangeAspect="1"/>
-          </p:cNvPicPr>
-          <p:nvPr/>
-        </p:nvPicPr>
-        <p:blipFill>
-          <a:blip r:embed="rId4"/>
-          <a:stretch>
-            <a:fillRect/>
-          </a:stretch>
-        </p:blipFill>
-        <p:spPr>
-          <a:xfrm>
-            <a:off x="1203690" y="3569710"/>
-            <a:ext cx="559052" cy="314467"/>
-          </a:xfrm>
-          <a:prstGeom prst="rect">
-            <a:avLst/>
-          </a:prstGeom>
-        </p:spPr>
-      </p:pic>
-      <p:pic>
-        <p:nvPicPr>
-          <p:cNvPr id="3" name="Grafik 2"/>
-          <p:cNvPicPr>
-            <a:picLocks noChangeAspect="1"/>
-          </p:cNvPicPr>
-          <p:nvPr/>
-        </p:nvPicPr>
-        <p:blipFill>
-          <a:blip r:embed="rId5"/>
-          <a:stretch>
-            <a:fillRect/>
-          </a:stretch>
-        </p:blipFill>
-        <p:spPr>
-          <a:xfrm>
-            <a:off x="5527450" y="1974667"/>
-            <a:ext cx="1390650" cy="847725"/>
-          </a:xfrm>
-          <a:prstGeom prst="rect">
-            <a:avLst/>
-          </a:prstGeom>
-        </p:spPr>
-      </p:pic>
     </p:spTree>
+    <p:extLst>
+      <p:ext uri="{BB962C8B-B14F-4D97-AF65-F5344CB8AC3E}">
+        <p14:creationId xmlns:p14="http://schemas.microsoft.com/office/powerpoint/2010/main" val="1980496311"/>
+      </p:ext>
+    </p:extLst>
   </p:cSld>
   <p:clrMapOvr>
     <a:masterClrMapping/>
@@ -3594,6 +4037,23 @@
             <a:r>
               <a:rPr lang="de-DE" noProof="0" dirty="0"/>
               <a:t>Besonderheiten der Bachelorarbeit</a:t>
+            </a:r>
+          </a:p>
+          <a:p>
+            <a:pPr marL="342900" indent="-342900">
+              <a:buFont typeface="Arial" panose="020B0604020202020204" pitchFamily="34" charset="0"/>
+              <a:buChar char="•"/>
+            </a:pPr>
+            <a:endParaRPr lang="de-DE" dirty="0"/>
+          </a:p>
+          <a:p>
+            <a:pPr marL="342900" indent="-342900">
+              <a:buFont typeface="Arial" panose="020B0604020202020204" pitchFamily="34" charset="0"/>
+              <a:buChar char="•"/>
+            </a:pPr>
+            <a:r>
+              <a:rPr lang="de-DE" noProof="0" dirty="0"/>
+              <a:t>Ähnliche Arbeiten</a:t>
             </a:r>
           </a:p>
           <a:p>
@@ -3903,7 +4363,7 @@
             </a:r>
             <a:r>
               <a:rPr lang="en-US" dirty="0"/>
-              <a:t> Zero Trust</a:t>
+              <a:t> Zero Trust?</a:t>
             </a:r>
             <a:br>
               <a:rPr lang="en-US" dirty="0"/>
@@ -3956,7 +4416,7 @@
             </a:pPr>
             <a:r>
               <a:rPr lang="de-DE" dirty="0"/>
-              <a:t>Ganzheitliches Denken</a:t>
+              <a:t>Angreifer innen und außerhalb</a:t>
             </a:r>
           </a:p>
           <a:p>
@@ -3973,24 +4433,37 @@
             </a:pPr>
             <a:r>
               <a:rPr lang="de-DE" dirty="0"/>
-              <a:t>Angreifer innen und außerhalb</a:t>
-            </a:r>
+              <a:t>Ganzheitliches Denken</a:t>
+            </a:r>
+          </a:p>
+          <a:p>
+            <a:endParaRPr lang="de-DE" dirty="0"/>
           </a:p>
           <a:p>
             <a:pPr marL="342900" indent="-342900">
               <a:buFont typeface="Arial" panose="020B0604020202020204" pitchFamily="34" charset="0"/>
               <a:buChar char="•"/>
             </a:pPr>
-            <a:endParaRPr lang="de-DE" dirty="0"/>
+            <a:r>
+              <a:rPr lang="de-DE" dirty="0"/>
+              <a:t>Kontinuierliche Überprüfung und Authentifizierung</a:t>
+            </a:r>
           </a:p>
           <a:p>
             <a:pPr marL="342900" indent="-342900">
               <a:buFont typeface="Arial" panose="020B0604020202020204" pitchFamily="34" charset="0"/>
               <a:buChar char="•"/>
             </a:pPr>
-            <a:r>
-              <a:rPr lang="de-DE" dirty="0"/>
-              <a:t>Kontinuierliche Überprüfung und Authentifizierung</a:t>
+            <a:endParaRPr lang="de-DE" dirty="0"/>
+          </a:p>
+          <a:p>
+            <a:pPr marL="342900" indent="-342900">
+              <a:buFont typeface="Arial" panose="020B0604020202020204" pitchFamily="34" charset="0"/>
+              <a:buChar char="•"/>
+            </a:pPr>
+            <a:r>
+              <a:rPr lang="de-DE" dirty="0"/>
+              <a:t>2001 Einführung des Begriffes</a:t>
             </a:r>
           </a:p>
           <a:p>
@@ -4033,7 +4506,7 @@
           <p:cNvPr id="2" name="Titel 1">
             <a:extLst>
               <a:ext uri="{FF2B5EF4-FFF2-40B4-BE49-F238E27FC236}">
-                <a16:creationId xmlns:a16="http://schemas.microsoft.com/office/drawing/2014/main" id="{F82336C3-E3CD-AAD2-76CD-EBC38CDF8EDD}"/>
+                <a16:creationId xmlns:a16="http://schemas.microsoft.com/office/drawing/2014/main" id="{E8867FC8-614B-BD70-D524-7C8CB33A0A7A}"/>
               </a:ext>
             </a:extLst>
           </p:cNvPr>
@@ -4051,7 +4524,7 @@
           <a:p>
             <a:r>
               <a:rPr lang="de-DE" dirty="0"/>
-              <a:t>Kernprinzipien</a:t>
+              <a:t>Was ist Zero Trust</a:t>
             </a:r>
           </a:p>
         </p:txBody>
@@ -4061,7 +4534,7 @@
           <p:cNvPr id="3" name="Inhaltsplatzhalter 2">
             <a:extLst>
               <a:ext uri="{FF2B5EF4-FFF2-40B4-BE49-F238E27FC236}">
-                <a16:creationId xmlns:a16="http://schemas.microsoft.com/office/drawing/2014/main" id="{0DB1E52C-4C7F-82A0-D3AD-93D5D48C65FC}"/>
+                <a16:creationId xmlns:a16="http://schemas.microsoft.com/office/drawing/2014/main" id="{50E11606-84E4-7D39-24AC-8CF5DF123563}"/>
               </a:ext>
             </a:extLst>
           </p:cNvPr>
@@ -4083,29 +4556,8 @@
             </a:pPr>
             <a:r>
               <a:rPr lang="de-DE" dirty="0"/>
-              <a:t>Never </a:t>
-            </a:r>
-            <a:r>
-              <a:rPr lang="de-DE" dirty="0" err="1"/>
-              <a:t>trust</a:t>
-            </a:r>
-            <a:r>
-              <a:rPr lang="de-DE" dirty="0"/>
-              <a:t> – </a:t>
-            </a:r>
-            <a:r>
-              <a:rPr lang="de-DE" dirty="0" err="1"/>
-              <a:t>always</a:t>
-            </a:r>
-            <a:r>
-              <a:rPr lang="de-DE" dirty="0"/>
-              <a:t> </a:t>
-            </a:r>
-            <a:r>
-              <a:rPr lang="de-DE" dirty="0" err="1"/>
-              <a:t>verify</a:t>
-            </a:r>
-            <a:endParaRPr lang="de-DE" dirty="0"/>
+              <a:t>NIST veröffentlicht Leitlinie SP 800-207</a:t>
+            </a:r>
           </a:p>
           <a:p>
             <a:pPr marL="342900" indent="-342900">
@@ -4120,76 +4572,13 @@
               <a:buChar char="•"/>
             </a:pPr>
             <a:r>
-              <a:rPr lang="de-DE" dirty="0"/>
-              <a:t>Least </a:t>
-            </a:r>
-            <a:r>
               <a:rPr lang="de-DE" dirty="0" err="1"/>
-              <a:t>privilege</a:t>
-            </a:r>
-            <a:endParaRPr lang="de-DE" dirty="0"/>
-          </a:p>
-          <a:p>
-            <a:pPr marL="342900" indent="-342900">
-              <a:buFont typeface="Arial" panose="020B0604020202020204" pitchFamily="34" charset="0"/>
-              <a:buChar char="•"/>
-            </a:pPr>
-            <a:endParaRPr lang="de-DE" dirty="0"/>
-          </a:p>
-          <a:p>
-            <a:pPr marL="342900" indent="-342900">
-              <a:buFont typeface="Arial" panose="020B0604020202020204" pitchFamily="34" charset="0"/>
-              <a:buChar char="•"/>
-            </a:pPr>
-            <a:r>
-              <a:rPr lang="de-DE" dirty="0"/>
-              <a:t>Micro </a:t>
-            </a:r>
-            <a:r>
-              <a:rPr lang="de-DE" dirty="0" err="1"/>
-              <a:t>segmentation</a:t>
-            </a:r>
-            <a:endParaRPr lang="de-DE" dirty="0"/>
-          </a:p>
-          <a:p>
-            <a:pPr marL="342900" indent="-342900">
-              <a:buFont typeface="Arial" panose="020B0604020202020204" pitchFamily="34" charset="0"/>
-              <a:buChar char="•"/>
-            </a:pPr>
-            <a:endParaRPr lang="de-DE" dirty="0"/>
-          </a:p>
-          <a:p>
-            <a:pPr marL="342900" indent="-342900">
-              <a:buFont typeface="Arial" panose="020B0604020202020204" pitchFamily="34" charset="0"/>
-              <a:buChar char="•"/>
-            </a:pPr>
-            <a:r>
-              <a:rPr lang="de-DE" dirty="0" err="1"/>
-              <a:t>Assume</a:t>
-            </a:r>
-            <a:r>
-              <a:rPr lang="de-DE" dirty="0"/>
-              <a:t> </a:t>
-            </a:r>
-            <a:r>
-              <a:rPr lang="de-DE" dirty="0" err="1"/>
-              <a:t>breach</a:t>
-            </a:r>
-            <a:endParaRPr lang="de-DE" dirty="0"/>
-          </a:p>
-          <a:p>
-            <a:pPr marL="342900" indent="-342900">
-              <a:buFont typeface="Arial" panose="020B0604020202020204" pitchFamily="34" charset="0"/>
-              <a:buChar char="•"/>
-            </a:pPr>
-            <a:endParaRPr lang="de-DE" dirty="0"/>
-          </a:p>
-          <a:p>
-            <a:pPr marL="342900" indent="-342900">
-              <a:buFont typeface="Arial" panose="020B0604020202020204" pitchFamily="34" charset="0"/>
-              <a:buChar char="•"/>
-            </a:pPr>
-            <a:endParaRPr lang="de-DE" dirty="0"/>
+              <a:t>BeyondCorp</a:t>
+            </a:r>
+            <a:r>
+              <a:rPr lang="de-DE" dirty="0"/>
+              <a:t> von Google</a:t>
+            </a:r>
           </a:p>
           <a:p>
             <a:endParaRPr lang="de-DE" dirty="0"/>
@@ -4199,7 +4588,7 @@
     </p:spTree>
     <p:extLst>
       <p:ext uri="{BB962C8B-B14F-4D97-AF65-F5344CB8AC3E}">
-        <p14:creationId xmlns:p14="http://schemas.microsoft.com/office/powerpoint/2010/main" val="1649397138"/>
+        <p14:creationId xmlns:p14="http://schemas.microsoft.com/office/powerpoint/2010/main" val="4283739452"/>
       </p:ext>
     </p:extLst>
   </p:cSld>
@@ -4231,6 +4620,204 @@
           <p:cNvPr id="2" name="Titel 1">
             <a:extLst>
               <a:ext uri="{FF2B5EF4-FFF2-40B4-BE49-F238E27FC236}">
+                <a16:creationId xmlns:a16="http://schemas.microsoft.com/office/drawing/2014/main" id="{F82336C3-E3CD-AAD2-76CD-EBC38CDF8EDD}"/>
+              </a:ext>
+            </a:extLst>
+          </p:cNvPr>
+          <p:cNvSpPr>
+            <a:spLocks noGrp="1"/>
+          </p:cNvSpPr>
+          <p:nvPr>
+            <p:ph type="title"/>
+          </p:nvPr>
+        </p:nvSpPr>
+        <p:spPr/>
+        <p:txBody>
+          <a:bodyPr/>
+          <a:lstStyle/>
+          <a:p>
+            <a:r>
+              <a:rPr lang="de-DE" dirty="0"/>
+              <a:t>Kernprinzipien</a:t>
+            </a:r>
+          </a:p>
+        </p:txBody>
+      </p:sp>
+      <p:sp>
+        <p:nvSpPr>
+          <p:cNvPr id="3" name="Inhaltsplatzhalter 2">
+            <a:extLst>
+              <a:ext uri="{FF2B5EF4-FFF2-40B4-BE49-F238E27FC236}">
+                <a16:creationId xmlns:a16="http://schemas.microsoft.com/office/drawing/2014/main" id="{0DB1E52C-4C7F-82A0-D3AD-93D5D48C65FC}"/>
+              </a:ext>
+            </a:extLst>
+          </p:cNvPr>
+          <p:cNvSpPr>
+            <a:spLocks noGrp="1"/>
+          </p:cNvSpPr>
+          <p:nvPr>
+            <p:ph idx="1"/>
+          </p:nvPr>
+        </p:nvSpPr>
+        <p:spPr/>
+        <p:txBody>
+          <a:bodyPr/>
+          <a:lstStyle/>
+          <a:p>
+            <a:pPr marL="342900" indent="-342900">
+              <a:buFont typeface="Arial" panose="020B0604020202020204" pitchFamily="34" charset="0"/>
+              <a:buChar char="•"/>
+            </a:pPr>
+            <a:r>
+              <a:rPr lang="de-DE" dirty="0"/>
+              <a:t>Never </a:t>
+            </a:r>
+            <a:r>
+              <a:rPr lang="de-DE" dirty="0" err="1"/>
+              <a:t>trust</a:t>
+            </a:r>
+            <a:r>
+              <a:rPr lang="de-DE" dirty="0"/>
+              <a:t> – </a:t>
+            </a:r>
+            <a:r>
+              <a:rPr lang="de-DE" dirty="0" err="1"/>
+              <a:t>always</a:t>
+            </a:r>
+            <a:r>
+              <a:rPr lang="de-DE" dirty="0"/>
+              <a:t> </a:t>
+            </a:r>
+            <a:r>
+              <a:rPr lang="de-DE" dirty="0" err="1"/>
+              <a:t>verify</a:t>
+            </a:r>
+            <a:endParaRPr lang="de-DE" dirty="0"/>
+          </a:p>
+          <a:p>
+            <a:pPr marL="342900" indent="-342900">
+              <a:buFont typeface="Arial" panose="020B0604020202020204" pitchFamily="34" charset="0"/>
+              <a:buChar char="•"/>
+            </a:pPr>
+            <a:endParaRPr lang="de-DE" dirty="0"/>
+          </a:p>
+          <a:p>
+            <a:pPr marL="342900" indent="-342900">
+              <a:buFont typeface="Arial" panose="020B0604020202020204" pitchFamily="34" charset="0"/>
+              <a:buChar char="•"/>
+            </a:pPr>
+            <a:r>
+              <a:rPr lang="de-DE" dirty="0"/>
+              <a:t>Least </a:t>
+            </a:r>
+            <a:r>
+              <a:rPr lang="de-DE" dirty="0" err="1"/>
+              <a:t>privilege</a:t>
+            </a:r>
+            <a:endParaRPr lang="de-DE" dirty="0"/>
+          </a:p>
+          <a:p>
+            <a:pPr marL="342900" indent="-342900">
+              <a:buFont typeface="Arial" panose="020B0604020202020204" pitchFamily="34" charset="0"/>
+              <a:buChar char="•"/>
+            </a:pPr>
+            <a:endParaRPr lang="de-DE" dirty="0"/>
+          </a:p>
+          <a:p>
+            <a:pPr marL="342900" indent="-342900">
+              <a:buFont typeface="Arial" panose="020B0604020202020204" pitchFamily="34" charset="0"/>
+              <a:buChar char="•"/>
+            </a:pPr>
+            <a:r>
+              <a:rPr lang="de-DE" dirty="0"/>
+              <a:t>Micro </a:t>
+            </a:r>
+            <a:r>
+              <a:rPr lang="de-DE" dirty="0" err="1"/>
+              <a:t>segmentation</a:t>
+            </a:r>
+            <a:endParaRPr lang="de-DE" dirty="0"/>
+          </a:p>
+          <a:p>
+            <a:pPr marL="342900" indent="-342900">
+              <a:buFont typeface="Arial" panose="020B0604020202020204" pitchFamily="34" charset="0"/>
+              <a:buChar char="•"/>
+            </a:pPr>
+            <a:endParaRPr lang="de-DE" dirty="0"/>
+          </a:p>
+          <a:p>
+            <a:pPr marL="342900" indent="-342900">
+              <a:buFont typeface="Arial" panose="020B0604020202020204" pitchFamily="34" charset="0"/>
+              <a:buChar char="•"/>
+            </a:pPr>
+            <a:r>
+              <a:rPr lang="de-DE" dirty="0" err="1"/>
+              <a:t>Assume</a:t>
+            </a:r>
+            <a:r>
+              <a:rPr lang="de-DE" dirty="0"/>
+              <a:t> </a:t>
+            </a:r>
+            <a:r>
+              <a:rPr lang="de-DE" dirty="0" err="1"/>
+              <a:t>breach</a:t>
+            </a:r>
+            <a:endParaRPr lang="de-DE" dirty="0"/>
+          </a:p>
+          <a:p>
+            <a:pPr marL="342900" indent="-342900">
+              <a:buFont typeface="Arial" panose="020B0604020202020204" pitchFamily="34" charset="0"/>
+              <a:buChar char="•"/>
+            </a:pPr>
+            <a:endParaRPr lang="de-DE" dirty="0"/>
+          </a:p>
+          <a:p>
+            <a:pPr marL="342900" indent="-342900">
+              <a:buFont typeface="Arial" panose="020B0604020202020204" pitchFamily="34" charset="0"/>
+              <a:buChar char="•"/>
+            </a:pPr>
+            <a:endParaRPr lang="de-DE" dirty="0"/>
+          </a:p>
+          <a:p>
+            <a:endParaRPr lang="de-DE" dirty="0"/>
+          </a:p>
+        </p:txBody>
+      </p:sp>
+    </p:spTree>
+    <p:extLst>
+      <p:ext uri="{BB962C8B-B14F-4D97-AF65-F5344CB8AC3E}">
+        <p14:creationId xmlns:p14="http://schemas.microsoft.com/office/powerpoint/2010/main" val="1649397138"/>
+      </p:ext>
+    </p:extLst>
+  </p:cSld>
+  <p:clrMapOvr>
+    <a:masterClrMapping/>
+  </p:clrMapOvr>
+</p:sld>
+</file>
+
+<file path=ppt/slides/slide7.xml><?xml version="1.0" encoding="utf-8"?>
+<p:sld xmlns:a="http://schemas.openxmlformats.org/drawingml/2006/main" xmlns:r="http://schemas.openxmlformats.org/officeDocument/2006/relationships" xmlns:p="http://schemas.openxmlformats.org/presentationml/2006/main">
+  <p:cSld>
+    <p:spTree>
+      <p:nvGrpSpPr>
+        <p:cNvPr id="1" name=""/>
+        <p:cNvGrpSpPr/>
+        <p:nvPr/>
+      </p:nvGrpSpPr>
+      <p:grpSpPr>
+        <a:xfrm>
+          <a:off x="0" y="0"/>
+          <a:ext cx="0" cy="0"/>
+          <a:chOff x="0" y="0"/>
+          <a:chExt cx="0" cy="0"/>
+        </a:xfrm>
+      </p:grpSpPr>
+      <p:sp>
+        <p:nvSpPr>
+          <p:cNvPr id="2" name="Titel 1">
+            <a:extLst>
+              <a:ext uri="{FF2B5EF4-FFF2-40B4-BE49-F238E27FC236}">
                 <a16:creationId xmlns:a16="http://schemas.microsoft.com/office/drawing/2014/main" id="{7544261B-BDBA-7E80-758F-0E4A2B63C0F0}"/>
               </a:ext>
             </a:extLst>
@@ -4367,7 +4954,7 @@
 </p:sld>
 </file>
 
-<file path=ppt/slides/slide7.xml><?xml version="1.0" encoding="utf-8"?>
+<file path=ppt/slides/slide8.xml><?xml version="1.0" encoding="utf-8"?>
 <p:sld xmlns:a="http://schemas.openxmlformats.org/drawingml/2006/main" xmlns:r="http://schemas.openxmlformats.org/officeDocument/2006/relationships" xmlns:p="http://schemas.openxmlformats.org/presentationml/2006/main">
   <p:cSld>
     <p:spTree>
@@ -4512,142 +5099,6 @@
 </p:sld>
 </file>
 
-<file path=ppt/slides/slide8.xml><?xml version="1.0" encoding="utf-8"?>
-<p:sld xmlns:a="http://schemas.openxmlformats.org/drawingml/2006/main" xmlns:r="http://schemas.openxmlformats.org/officeDocument/2006/relationships" xmlns:p="http://schemas.openxmlformats.org/presentationml/2006/main">
-  <p:cSld>
-    <p:spTree>
-      <p:nvGrpSpPr>
-        <p:cNvPr id="1" name=""/>
-        <p:cNvGrpSpPr/>
-        <p:nvPr/>
-      </p:nvGrpSpPr>
-      <p:grpSpPr>
-        <a:xfrm>
-          <a:off x="0" y="0"/>
-          <a:ext cx="0" cy="0"/>
-          <a:chOff x="0" y="0"/>
-          <a:chExt cx="0" cy="0"/>
-        </a:xfrm>
-      </p:grpSpPr>
-      <p:sp>
-        <p:nvSpPr>
-          <p:cNvPr id="2" name="Titel 1">
-            <a:extLst>
-              <a:ext uri="{FF2B5EF4-FFF2-40B4-BE49-F238E27FC236}">
-                <a16:creationId xmlns:a16="http://schemas.microsoft.com/office/drawing/2014/main" id="{563F27CD-4BE8-EF7C-845E-04669F997AF5}"/>
-              </a:ext>
-            </a:extLst>
-          </p:cNvPr>
-          <p:cNvSpPr>
-            <a:spLocks noGrp="1"/>
-          </p:cNvSpPr>
-          <p:nvPr>
-            <p:ph type="title"/>
-          </p:nvPr>
-        </p:nvSpPr>
-        <p:spPr/>
-        <p:txBody>
-          <a:bodyPr/>
-          <a:lstStyle/>
-          <a:p>
-            <a:r>
-              <a:rPr lang="en-US" dirty="0" err="1"/>
-              <a:t>Besonderheiten</a:t>
-            </a:r>
-            <a:r>
-              <a:rPr lang="en-US" dirty="0"/>
-              <a:t> der </a:t>
-            </a:r>
-            <a:r>
-              <a:rPr lang="en-US" dirty="0" err="1"/>
-              <a:t>Bachelorarbeit</a:t>
-            </a:r>
-            <a:endParaRPr lang="en-US" dirty="0"/>
-          </a:p>
-        </p:txBody>
-      </p:sp>
-      <p:sp>
-        <p:nvSpPr>
-          <p:cNvPr id="3" name="Inhaltsplatzhalter 2">
-            <a:extLst>
-              <a:ext uri="{FF2B5EF4-FFF2-40B4-BE49-F238E27FC236}">
-                <a16:creationId xmlns:a16="http://schemas.microsoft.com/office/drawing/2014/main" id="{790EDDA1-6DE8-A711-C9E3-E3D51336A76C}"/>
-              </a:ext>
-            </a:extLst>
-          </p:cNvPr>
-          <p:cNvSpPr>
-            <a:spLocks noGrp="1"/>
-          </p:cNvSpPr>
-          <p:nvPr>
-            <p:ph idx="1"/>
-          </p:nvPr>
-        </p:nvSpPr>
-        <p:spPr/>
-        <p:txBody>
-          <a:bodyPr/>
-          <a:lstStyle/>
-          <a:p>
-            <a:r>
-              <a:rPr lang="de-DE" dirty="0"/>
-              <a:t>Umsetzung eines ZTN in einer Testumgebung</a:t>
-            </a:r>
-          </a:p>
-          <a:p>
-            <a:endParaRPr lang="de-DE" dirty="0"/>
-          </a:p>
-          <a:p>
-            <a:r>
-              <a:rPr lang="de-DE" dirty="0" err="1"/>
-              <a:t>FortiNet</a:t>
-            </a:r>
-            <a:r>
-              <a:rPr lang="de-DE" dirty="0"/>
-              <a:t> Produktpalette</a:t>
-            </a:r>
-          </a:p>
-          <a:p>
-            <a:endParaRPr lang="de-DE" dirty="0"/>
-          </a:p>
-          <a:p>
-            <a:r>
-              <a:rPr lang="de-DE" dirty="0"/>
-              <a:t>Umsetzung von </a:t>
-            </a:r>
-            <a:r>
-              <a:rPr lang="de-DE" dirty="0" err="1"/>
-              <a:t>best</a:t>
-            </a:r>
-            <a:r>
-              <a:rPr lang="de-DE" dirty="0"/>
-              <a:t> </a:t>
-            </a:r>
-            <a:r>
-              <a:rPr lang="de-DE" dirty="0" err="1"/>
-              <a:t>practis</a:t>
-            </a:r>
-            <a:endParaRPr lang="de-DE" dirty="0"/>
-          </a:p>
-          <a:p>
-            <a:endParaRPr lang="de-DE" dirty="0"/>
-          </a:p>
-          <a:p>
-            <a:endParaRPr lang="de-DE" dirty="0"/>
-          </a:p>
-        </p:txBody>
-      </p:sp>
-    </p:spTree>
-    <p:extLst>
-      <p:ext uri="{BB962C8B-B14F-4D97-AF65-F5344CB8AC3E}">
-        <p14:creationId xmlns:p14="http://schemas.microsoft.com/office/powerpoint/2010/main" val="344867331"/>
-      </p:ext>
-    </p:extLst>
-  </p:cSld>
-  <p:clrMapOvr>
-    <a:masterClrMapping/>
-  </p:clrMapOvr>
-</p:sld>
-</file>
-
 <file path=ppt/slides/slide9.xml><?xml version="1.0" encoding="utf-8"?>
 <p:sld xmlns:a="http://schemas.openxmlformats.org/drawingml/2006/main" xmlns:r="http://schemas.openxmlformats.org/officeDocument/2006/relationships" xmlns:p="http://schemas.openxmlformats.org/presentationml/2006/main">
   <p:cSld>
@@ -4670,7 +5121,7 @@
           <p:cNvPr id="2" name="Titel 1">
             <a:extLst>
               <a:ext uri="{FF2B5EF4-FFF2-40B4-BE49-F238E27FC236}">
-                <a16:creationId xmlns:a16="http://schemas.microsoft.com/office/drawing/2014/main" id="{459502B1-CF46-70C6-D6DE-641574FAAB28}"/>
+                <a16:creationId xmlns:a16="http://schemas.microsoft.com/office/drawing/2014/main" id="{563F27CD-4BE8-EF7C-845E-04669F997AF5}"/>
               </a:ext>
             </a:extLst>
           </p:cNvPr>
@@ -4687,9 +5138,18 @@
           <a:lstStyle/>
           <a:p>
             <a:r>
-              <a:rPr lang="de-DE" dirty="0"/>
-              <a:t>Ähnliche Arbeiten</a:t>
-            </a:r>
+              <a:rPr lang="en-US" dirty="0" err="1"/>
+              <a:t>Besonderheiten</a:t>
+            </a:r>
+            <a:r>
+              <a:rPr lang="en-US" dirty="0"/>
+              <a:t> der </a:t>
+            </a:r>
+            <a:r>
+              <a:rPr lang="en-US" dirty="0" err="1"/>
+              <a:t>Bachelorarbeit</a:t>
+            </a:r>
+            <a:endParaRPr lang="en-US" dirty="0"/>
           </a:p>
         </p:txBody>
       </p:sp>
@@ -4698,7 +5158,7 @@
           <p:cNvPr id="3" name="Inhaltsplatzhalter 2">
             <a:extLst>
               <a:ext uri="{FF2B5EF4-FFF2-40B4-BE49-F238E27FC236}">
-                <a16:creationId xmlns:a16="http://schemas.microsoft.com/office/drawing/2014/main" id="{9864D2B7-575B-D770-0679-035A650D5DE6}"/>
+                <a16:creationId xmlns:a16="http://schemas.microsoft.com/office/drawing/2014/main" id="{790EDDA1-6DE8-A711-C9E3-E3D51336A76C}"/>
               </a:ext>
             </a:extLst>
           </p:cNvPr>
@@ -4719,92 +5179,73 @@
               <a:buChar char="•"/>
             </a:pPr>
             <a:r>
-              <a:rPr lang="en-US" dirty="0"/>
-              <a:t>Cornelius </a:t>
-            </a:r>
-            <a:r>
-              <a:rPr lang="en-US" dirty="0" err="1"/>
-              <a:t>Itodo</a:t>
-            </a:r>
-            <a:r>
-              <a:rPr lang="en-US" dirty="0"/>
-              <a:t>, Murat Ozer</a:t>
-            </a:r>
-            <a:br>
-              <a:rPr lang="en-US" dirty="0"/>
-            </a:br>
-            <a:r>
-              <a:rPr lang="en-US" dirty="0"/>
-              <a:t>Multivocal literature review on zero-trust security implementation</a:t>
-            </a:r>
-            <a:br>
-              <a:rPr lang="de-DE" b="0" i="0" dirty="0">
-                <a:solidFill>
-                  <a:srgbClr val="1F1F1F"/>
-                </a:solidFill>
-                <a:effectLst/>
-                <a:latin typeface="ElsevierSans"/>
-              </a:rPr>
-            </a:br>
-            <a:r>
-              <a:rPr lang="de-DE" sz="1800" b="0" i="0" dirty="0">
-                <a:solidFill>
-                  <a:srgbClr val="1F1F1F"/>
-                </a:solidFill>
-                <a:effectLst/>
-                <a:latin typeface="ElsevierSans"/>
-                <a:hlinkClick r:id="rId2"/>
-              </a:rPr>
-              <a:t>https://www.sciencedirect.com/science/article/abs/pii/S0167404824001287</a:t>
-            </a:r>
-            <a:endParaRPr lang="de-DE" sz="1800" b="0" i="0" dirty="0">
-              <a:solidFill>
-                <a:srgbClr val="1F1F1F"/>
-              </a:solidFill>
-              <a:effectLst/>
-              <a:latin typeface="ElsevierSans"/>
-            </a:endParaRPr>
+              <a:rPr lang="de-DE" dirty="0"/>
+              <a:t>Umsetzung eines ZTN in einer Testumgebung</a:t>
+            </a:r>
           </a:p>
           <a:p>
             <a:pPr marL="342900" indent="-342900">
               <a:buFont typeface="Arial" panose="020B0604020202020204" pitchFamily="34" charset="0"/>
               <a:buChar char="•"/>
             </a:pPr>
-            <a:endParaRPr lang="de-DE" sz="1800" dirty="0">
-              <a:solidFill>
-                <a:srgbClr val="1F1F1F"/>
-              </a:solidFill>
-              <a:latin typeface="ElsevierSans"/>
-            </a:endParaRPr>
+            <a:endParaRPr lang="de-DE" dirty="0"/>
           </a:p>
           <a:p>
             <a:pPr marL="342900" indent="-342900">
               <a:buFont typeface="Arial" panose="020B0604020202020204" pitchFamily="34" charset="0"/>
               <a:buChar char="•"/>
             </a:pPr>
-            <a:br>
-              <a:rPr lang="en-US" b="0" i="0" dirty="0">
-                <a:solidFill>
-                  <a:srgbClr val="1F1F1F"/>
-                </a:solidFill>
-                <a:effectLst/>
-                <a:latin typeface="ElsevierGulliver"/>
-              </a:rPr>
-            </a:br>
-            <a:endParaRPr lang="en-US" b="0" i="0" dirty="0">
-              <a:solidFill>
-                <a:srgbClr val="1F1F1F"/>
-              </a:solidFill>
-              <a:effectLst/>
-              <a:latin typeface="ElsevierGulliver"/>
-            </a:endParaRPr>
+            <a:r>
+              <a:rPr lang="de-DE" dirty="0" err="1"/>
+              <a:t>FortiNet</a:t>
+            </a:r>
+            <a:r>
+              <a:rPr lang="de-DE" dirty="0"/>
+              <a:t> Produktpalette</a:t>
+            </a:r>
+          </a:p>
+          <a:p>
+            <a:pPr marL="342900" indent="-342900">
+              <a:buFont typeface="Arial" panose="020B0604020202020204" pitchFamily="34" charset="0"/>
+              <a:buChar char="•"/>
+            </a:pPr>
+            <a:endParaRPr lang="de-DE" dirty="0"/>
+          </a:p>
+          <a:p>
+            <a:pPr marL="342900" indent="-342900">
+              <a:buFont typeface="Arial" panose="020B0604020202020204" pitchFamily="34" charset="0"/>
+              <a:buChar char="•"/>
+            </a:pPr>
+            <a:r>
+              <a:rPr lang="de-DE" dirty="0"/>
+              <a:t>Umsetzung der Bausteine nach </a:t>
+            </a:r>
+            <a:r>
+              <a:rPr lang="de-DE" dirty="0" err="1"/>
+              <a:t>best</a:t>
+            </a:r>
+            <a:r>
+              <a:rPr lang="de-DE" dirty="0"/>
+              <a:t> </a:t>
+            </a:r>
+            <a:r>
+              <a:rPr lang="de-DE" dirty="0" err="1"/>
+              <a:t>practise</a:t>
+            </a:r>
+            <a:endParaRPr lang="de-DE" dirty="0"/>
+          </a:p>
+          <a:p>
+            <a:endParaRPr lang="de-DE" dirty="0"/>
+          </a:p>
+          <a:p>
+            <a:endParaRPr lang="de-DE" dirty="0"/>
           </a:p>
         </p:txBody>
       </p:sp>
     </p:spTree>
     <p:extLst>
       <p:ext uri="{BB962C8B-B14F-4D97-AF65-F5344CB8AC3E}">
-        <p14:creationId xmlns:p14="http://schemas.microsoft.com/office/powerpoint/2010/main" val="2480421540"/>
+        <p14:creationId xmlns:p14="http://schemas.microsoft.com/office/powerpoint/2010/main" val="344867331"/>
       </p:ext>
     </p:extLst>
   </p:cSld>

--- a/Meetings/ZTN Präsentation.pptx
+++ b/Meetings/ZTN Präsentation.pptx
@@ -425,7 +425,7 @@
               <a:pPr>
                 <a:defRPr/>
               </a:pPr>
-              <a:t>25.05.2025</a:t>
+              <a:t>26.05.2025</a:t>
             </a:fld>
             <a:endParaRPr lang="de-DE" dirty="0"/>
           </a:p>
@@ -608,7 +608,7 @@
               <a:pPr>
                 <a:defRPr/>
               </a:pPr>
-              <a:t>25.05.2025</a:t>
+              <a:t>26.05.2025</a:t>
             </a:fld>
             <a:endParaRPr lang="de-DE" dirty="0"/>
           </a:p>
@@ -1734,6 +1734,27 @@
         <p:txBody>
           <a:bodyPr/>
           <a:lstStyle/>
+          <a:p>
+            <a:r>
+              <a:rPr lang="de-DE" dirty="0" err="1"/>
+              <a:t>Lesson</a:t>
+            </a:r>
+            <a:r>
+              <a:rPr lang="de-DE" dirty="0"/>
+              <a:t> </a:t>
+            </a:r>
+            <a:r>
+              <a:rPr lang="de-DE" dirty="0" err="1"/>
+              <a:t>learnd</a:t>
+            </a:r>
+            <a:r>
+              <a:rPr lang="de-DE" dirty="0"/>
+              <a:t> – wie kann man das am besten umsetze</a:t>
+            </a:r>
+          </a:p>
+          <a:p>
+            <a:endParaRPr lang="de-DE" dirty="0"/>
+          </a:p>
           <a:p>
             <a:endParaRPr lang="de-DE" dirty="0"/>
           </a:p>
@@ -4971,41 +4992,6 @@
           <a:chExt cx="0" cy="0"/>
         </a:xfrm>
       </p:grpSpPr>
-      <p:pic>
-        <p:nvPicPr>
-          <p:cNvPr id="5" name="Inhaltsplatzhalter 4" descr="Ein Bild, das Text, Diagramm, Plan, technische Zeichnung enthält.&#10;&#10;KI-generierte Inhalte können fehlerhaft sein.">
-            <a:extLst>
-              <a:ext uri="{FF2B5EF4-FFF2-40B4-BE49-F238E27FC236}">
-                <a16:creationId xmlns:a16="http://schemas.microsoft.com/office/drawing/2014/main" id="{08015E64-446A-16C6-5DD2-6F38CECBFBEE}"/>
-              </a:ext>
-            </a:extLst>
-          </p:cNvPr>
-          <p:cNvPicPr>
-            <a:picLocks noGrp="1" noChangeAspect="1"/>
-          </p:cNvPicPr>
-          <p:nvPr>
-            <p:ph idx="1"/>
-          </p:nvPr>
-        </p:nvPicPr>
-        <p:blipFill>
-          <a:blip r:embed="rId2" cstate="print">
-            <a:extLst>
-              <a:ext uri="{28A0092B-C50C-407E-A947-70E740481C1C}">
-                <a14:useLocalDpi xmlns:a14="http://schemas.microsoft.com/office/drawing/2010/main" val="0"/>
-              </a:ext>
-            </a:extLst>
-          </a:blip>
-          <a:stretch>
-            <a:fillRect/>
-          </a:stretch>
-        </p:blipFill>
-        <p:spPr>
-          <a:xfrm>
-            <a:off x="0" y="1279771"/>
-            <a:ext cx="9144000" cy="5197229"/>
-          </a:xfrm>
-        </p:spPr>
-      </p:pic>
       <p:sp>
         <p:nvSpPr>
           <p:cNvPr id="2" name="Titel 1">
@@ -5086,6 +5072,41 @@
           </a:p>
         </p:txBody>
       </p:sp>
+      <p:pic>
+        <p:nvPicPr>
+          <p:cNvPr id="7" name="Inhaltsplatzhalter 6" descr="Ein Bild, das Text, Diagramm, Plan, technische Zeichnung enthält.&#10;&#10;KI-generierte Inhalte können fehlerhaft sein.">
+            <a:extLst>
+              <a:ext uri="{FF2B5EF4-FFF2-40B4-BE49-F238E27FC236}">
+                <a16:creationId xmlns:a16="http://schemas.microsoft.com/office/drawing/2014/main" id="{622808D3-AE05-F6D8-A7FC-4C729EBAA24A}"/>
+              </a:ext>
+            </a:extLst>
+          </p:cNvPr>
+          <p:cNvPicPr>
+            <a:picLocks noGrp="1" noChangeAspect="1"/>
+          </p:cNvPicPr>
+          <p:nvPr>
+            <p:ph idx="1"/>
+          </p:nvPr>
+        </p:nvPicPr>
+        <p:blipFill>
+          <a:blip r:embed="rId2" cstate="print">
+            <a:extLst>
+              <a:ext uri="{28A0092B-C50C-407E-A947-70E740481C1C}">
+                <a14:useLocalDpi xmlns:a14="http://schemas.microsoft.com/office/drawing/2010/main" val="0"/>
+              </a:ext>
+            </a:extLst>
+          </a:blip>
+          <a:stretch>
+            <a:fillRect/>
+          </a:stretch>
+        </p:blipFill>
+        <p:spPr>
+          <a:xfrm>
+            <a:off x="0" y="1279771"/>
+            <a:ext cx="9144000" cy="5197230"/>
+          </a:xfrm>
+        </p:spPr>
+      </p:pic>
     </p:spTree>
     <p:extLst>
       <p:ext uri="{BB962C8B-B14F-4D97-AF65-F5344CB8AC3E}">
